--- a/EventRadar_Presentation.pptx
+++ b/EventRadar_Presentation.pptx
@@ -10,6 +10,7 @@
     <p:sldId id="258" r:id="rId9"/>
     <p:sldId id="259" r:id="rId10"/>
     <p:sldId id="260" r:id="rId11"/>
+    <p:sldId id="261" r:id="rId12"/>
   </p:sldIdLst>
   <p:sldSz cx="12191695" cy="6858000" type="screen4x3"/>
   <p:notesSz cx="6858000" cy="9144000"/>
@@ -3088,7 +3089,7 @@
     <p:bg>
       <p:bgPr>
         <a:solidFill>
-          <a:srgbClr val="0B0F19"/>
+          <a:srgbClr val="F8FAFC"/>
         </a:solidFill>
         <a:effectLst/>
       </p:bgPr>
@@ -3102,132 +3103,24 @@
       <p:grpSpPr/>
       <p:sp>
         <p:nvSpPr>
-          <p:cNvPr id="2" name="TextBox 1"/>
-          <p:cNvSpPr txBox="1"/>
-          <p:nvPr/>
-        </p:nvSpPr>
-        <p:spPr>
-          <a:xfrm>
-            <a:off x="731520" y="411480"/>
-            <a:ext cx="7315200" cy="320040"/>
-          </a:xfrm>
-          <a:prstGeom prst="rect">
-            <a:avLst/>
-          </a:prstGeom>
-          <a:noFill/>
-        </p:spPr>
-        <p:txBody>
-          <a:bodyPr wrap="square">
-            <a:spAutoFit/>
-          </a:bodyPr>
-          <a:lstStyle/>
-          <a:p>
-            <a:pPr>
-              <a:defRPr sz="1000" b="1">
-                <a:solidFill>
-                  <a:srgbClr val="06B6D4"/>
-                </a:solidFill>
-                <a:latin typeface="Segoe UI"/>
-              </a:defRPr>
-            </a:pPr>
-            <a:r>
-              <a:t>EVENT RADAR  •  SLIDE 01 OF 5  •  VECNAVERSE HACKATHON</a:t>
-            </a:r>
-          </a:p>
-        </p:txBody>
-      </p:sp>
-      <p:sp>
-        <p:nvSpPr>
-          <p:cNvPr id="3" name="TextBox 2"/>
-          <p:cNvSpPr txBox="1"/>
-          <p:nvPr/>
-        </p:nvSpPr>
-        <p:spPr>
-          <a:xfrm>
-            <a:off x="731520" y="685800"/>
-            <a:ext cx="10515600" cy="685800"/>
-          </a:xfrm>
-          <a:prstGeom prst="rect">
-            <a:avLst/>
-          </a:prstGeom>
-          <a:noFill/>
-        </p:spPr>
-        <p:txBody>
-          <a:bodyPr wrap="square">
-            <a:spAutoFit/>
-          </a:bodyPr>
-          <a:lstStyle/>
-          <a:p>
-            <a:pPr>
-              <a:defRPr sz="2600" b="1">
-                <a:solidFill>
-                  <a:srgbClr val="F8FAFC"/>
-                </a:solidFill>
-                <a:latin typeface="Segoe UI"/>
-              </a:defRPr>
-            </a:pPr>
-            <a:r>
-              <a:t>Problem Statement and Understanding</a:t>
-            </a:r>
-          </a:p>
-        </p:txBody>
-      </p:sp>
-      <p:sp>
-        <p:nvSpPr>
-          <p:cNvPr id="4" name="TextBox 3"/>
-          <p:cNvSpPr txBox="1"/>
-          <p:nvPr/>
-        </p:nvSpPr>
-        <p:spPr>
-          <a:xfrm>
-            <a:off x="731520" y="1371600"/>
-            <a:ext cx="10515600" cy="411480"/>
-          </a:xfrm>
-          <a:prstGeom prst="rect">
-            <a:avLst/>
-          </a:prstGeom>
-          <a:noFill/>
-        </p:spPr>
-        <p:txBody>
-          <a:bodyPr wrap="square">
-            <a:spAutoFit/>
-          </a:bodyPr>
-          <a:lstStyle/>
-          <a:p>
-            <a:pPr>
-              <a:defRPr sz="1300">
-                <a:solidFill>
-                  <a:srgbClr val="94A3B8"/>
-                </a:solidFill>
-                <a:latin typeface="Segoe UI"/>
-              </a:defRPr>
-            </a:pPr>
-            <a:r>
-              <a:t>Urban India has millions of creators &amp; developers, but zero unified hyperlocal event discovery.</a:t>
-            </a:r>
-          </a:p>
-        </p:txBody>
-      </p:sp>
-      <p:sp>
-        <p:nvSpPr>
-          <p:cNvPr id="5" name="Rounded Rectangle 4"/>
+          <p:cNvPr id="2" name="Rounded Rectangle 1"/>
           <p:cNvSpPr/>
           <p:nvPr/>
         </p:nvSpPr>
         <p:spPr>
           <a:xfrm>
-            <a:off x="731520" y="1920240"/>
-            <a:ext cx="3291840" cy="4297680"/>
+            <a:off x="731520" y="411480"/>
+            <a:ext cx="4114800" cy="292608"/>
           </a:xfrm>
           <a:prstGeom prst="roundRect">
             <a:avLst/>
           </a:prstGeom>
           <a:solidFill>
-            <a:srgbClr val="161C2D"/>
+            <a:srgbClr val="EEF2FF"/>
           </a:solidFill>
           <a:ln w="12700">
             <a:solidFill>
-              <a:srgbClr val="262E45"/>
+              <a:srgbClr val="C7D2FE"/>
             </a:solidFill>
           </a:ln>
         </p:spPr>
@@ -3249,20 +3142,30 @@
           <a:bodyPr rtlCol="0" anchor="ctr"/>
           <a:lstStyle/>
           <a:p>
-            <a:pPr algn="ctr"/>
-          </a:p>
-        </p:txBody>
-      </p:sp>
-      <p:sp>
-        <p:nvSpPr>
-          <p:cNvPr id="6" name="TextBox 5"/>
+            <a:pPr algn="ctr">
+              <a:defRPr sz="950" b="1">
+                <a:solidFill>
+                  <a:srgbClr val="2563EB"/>
+                </a:solidFill>
+                <a:latin typeface="Segoe UI"/>
+              </a:defRPr>
+            </a:pPr>
+            <a:r>
+              <a:t>EVENT RADAR  •  SLIDE 01 OF 6  •  TEAM VP BOYS</a:t>
+            </a:r>
+          </a:p>
+        </p:txBody>
+      </p:sp>
+      <p:sp>
+        <p:nvSpPr>
+          <p:cNvPr id="3" name="TextBox 2"/>
           <p:cNvSpPr txBox="1"/>
           <p:nvPr/>
         </p:nvSpPr>
         <p:spPr>
           <a:xfrm>
-            <a:off x="914400" y="2103120"/>
-            <a:ext cx="2926080" cy="457200"/>
+            <a:off x="731520" y="777240"/>
+            <a:ext cx="10698480" cy="640080"/>
           </a:xfrm>
           <a:prstGeom prst="rect">
             <a:avLst/>
@@ -3270,35 +3173,35 @@
           <a:noFill/>
         </p:spPr>
         <p:txBody>
-          <a:bodyPr wrap="square">
+          <a:bodyPr wrap="none">
             <a:spAutoFit/>
           </a:bodyPr>
           <a:lstStyle/>
           <a:p>
             <a:pPr>
-              <a:defRPr sz="1500" b="1">
-                <a:solidFill>
-                  <a:srgbClr val="A855F7"/>
-                </a:solidFill>
-                <a:latin typeface="Segoe UI"/>
-              </a:defRPr>
-            </a:pPr>
-            <a:r>
-              <a:t>1. Fragmented &amp; Lost Events</a:t>
-            </a:r>
-          </a:p>
-        </p:txBody>
-      </p:sp>
-      <p:sp>
-        <p:nvSpPr>
-          <p:cNvPr id="7" name="TextBox 6"/>
+              <a:defRPr sz="2800" b="1">
+                <a:solidFill>
+                  <a:srgbClr val="0F172A"/>
+                </a:solidFill>
+                <a:latin typeface="Segoe UI"/>
+              </a:defRPr>
+            </a:pPr>
+            <a:r>
+              <a:t>Introduction &amp; Team Profile</a:t>
+            </a:r>
+          </a:p>
+        </p:txBody>
+      </p:sp>
+      <p:sp>
+        <p:nvSpPr>
+          <p:cNvPr id="4" name="TextBox 3"/>
           <p:cNvSpPr txBox="1"/>
           <p:nvPr/>
         </p:nvSpPr>
         <p:spPr>
           <a:xfrm>
-            <a:off x="914400" y="2560320"/>
-            <a:ext cx="2926080" cy="3520440"/>
+            <a:off x="731520" y="1371600"/>
+            <a:ext cx="10698480" cy="365760"/>
           </a:xfrm>
           <a:prstGeom prst="rect">
             <a:avLst/>
@@ -3306,96 +3209,45 @@
           <a:noFill/>
         </p:spPr>
         <p:txBody>
-          <a:bodyPr wrap="square">
+          <a:bodyPr wrap="none">
             <a:spAutoFit/>
           </a:bodyPr>
           <a:lstStyle/>
           <a:p>
             <a:pPr>
-              <a:spcAft>
-                <a:spcPts val="800"/>
-              </a:spcAft>
-              <a:defRPr sz="1150">
-                <a:solidFill>
-                  <a:srgbClr val="F8FAFC"/>
-                </a:solidFill>
-                <a:latin typeface="Segoe UI"/>
-              </a:defRPr>
-            </a:pPr>
-            <a:r>
-              <a:t>• 85%+ of tech meetups, hackathons, and cultural jams are trapped in private WhatsApp groups or fleeting Instagram stories.</a:t>
-            </a:r>
-          </a:p>
-          <a:p>
-            <a:pPr>
-              <a:spcAft>
-                <a:spcPts val="800"/>
-              </a:spcAft>
-              <a:defRPr sz="1150">
-                <a:solidFill>
-                  <a:srgbClr val="F8FAFC"/>
-                </a:solidFill>
-                <a:latin typeface="Segoe UI"/>
-              </a:defRPr>
-            </a:pPr>
-            <a:r>
-              <a:t>• Zero centralized directory for spontaneous, neighborhood gatherings.</a:t>
-            </a:r>
-          </a:p>
-          <a:p>
-            <a:pPr>
-              <a:spcAft>
-                <a:spcPts val="800"/>
-              </a:spcAft>
-              <a:defRPr sz="1150">
-                <a:solidFill>
-                  <a:srgbClr val="F8FAFC"/>
-                </a:solidFill>
-                <a:latin typeface="Segoe UI"/>
-              </a:defRPr>
-            </a:pPr>
-            <a:r>
-              <a:t>• High opportunity cost: Builders miss key networking happening 2 km away.</a:t>
-            </a:r>
-          </a:p>
-          <a:p>
-            <a:pPr>
-              <a:spcAft>
-                <a:spcPts val="800"/>
-              </a:spcAft>
-              <a:defRPr sz="1150">
-                <a:solidFill>
-                  <a:srgbClr val="F8FAFC"/>
-                </a:solidFill>
-                <a:latin typeface="Segoe UI"/>
-              </a:defRPr>
-            </a:pPr>
-            <a:r>
-              <a:t>• Zero discoverability for first-time or indie community organizers.</a:t>
-            </a:r>
-          </a:p>
-        </p:txBody>
-      </p:sp>
-      <p:sp>
-        <p:nvSpPr>
-          <p:cNvPr id="8" name="Rounded Rectangle 7"/>
+              <a:defRPr sz="1300">
+                <a:solidFill>
+                  <a:srgbClr val="64748B"/>
+                </a:solidFill>
+                <a:latin typeface="Segoe UI"/>
+              </a:defRPr>
+            </a:pPr>
+            <a:r>
+              <a:t>Hyperlocal Community &amp; Tech Event Discovery Engine with Zero Infrastructure Cost</a:t>
+            </a:r>
+          </a:p>
+        </p:txBody>
+      </p:sp>
+      <p:sp>
+        <p:nvSpPr>
+          <p:cNvPr id="5" name="Rounded Rectangle 4"/>
           <p:cNvSpPr/>
           <p:nvPr/>
         </p:nvSpPr>
         <p:spPr>
           <a:xfrm>
-            <a:off x="4389120" y="1920240"/>
-            <a:ext cx="3291840" cy="4297680"/>
+            <a:off x="731520" y="1920240"/>
+            <a:ext cx="5120640" cy="4297680"/>
           </a:xfrm>
           <a:prstGeom prst="roundRect">
             <a:avLst/>
           </a:prstGeom>
           <a:solidFill>
-            <a:srgbClr val="161C2D"/>
+            <a:srgbClr val="FFFFFF"/>
           </a:solidFill>
           <a:ln w="12700">
             <a:solidFill>
-              <a:srgbClr val="262E45"/>
+              <a:srgbClr val="E2E8F0"/>
             </a:solidFill>
           </a:ln>
         </p:spPr>
@@ -3423,148 +3275,23 @@
       </p:sp>
       <p:sp>
         <p:nvSpPr>
-          <p:cNvPr id="9" name="TextBox 8"/>
-          <p:cNvSpPr txBox="1"/>
-          <p:nvPr/>
-        </p:nvSpPr>
-        <p:spPr>
-          <a:xfrm>
-            <a:off x="4572000" y="2103120"/>
-            <a:ext cx="2926080" cy="457200"/>
-          </a:xfrm>
-          <a:prstGeom prst="rect">
-            <a:avLst/>
-          </a:prstGeom>
-          <a:noFill/>
-        </p:spPr>
-        <p:txBody>
-          <a:bodyPr wrap="square">
-            <a:spAutoFit/>
-          </a:bodyPr>
-          <a:lstStyle/>
-          <a:p>
-            <a:pPr>
-              <a:defRPr sz="1500" b="1">
-                <a:solidFill>
-                  <a:srgbClr val="06B6D4"/>
-                </a:solidFill>
-                <a:latin typeface="Segoe UI"/>
-              </a:defRPr>
-            </a:pPr>
-            <a:r>
-              <a:t>2. The 'Hyperlocal' Void</a:t>
-            </a:r>
-          </a:p>
-        </p:txBody>
-      </p:sp>
-      <p:sp>
-        <p:nvSpPr>
-          <p:cNvPr id="10" name="TextBox 9"/>
-          <p:cNvSpPr txBox="1"/>
-          <p:nvPr/>
-        </p:nvSpPr>
-        <p:spPr>
-          <a:xfrm>
-            <a:off x="4572000" y="2560320"/>
-            <a:ext cx="2926080" cy="3520440"/>
-          </a:xfrm>
-          <a:prstGeom prst="rect">
-            <a:avLst/>
-          </a:prstGeom>
-          <a:noFill/>
-        </p:spPr>
-        <p:txBody>
-          <a:bodyPr wrap="square">
-            <a:spAutoFit/>
-          </a:bodyPr>
-          <a:lstStyle/>
-          <a:p>
-            <a:pPr>
-              <a:spcAft>
-                <a:spcPts val="800"/>
-              </a:spcAft>
-              <a:defRPr sz="1150">
-                <a:solidFill>
-                  <a:srgbClr val="F8FAFC"/>
-                </a:solidFill>
-                <a:latin typeface="Segoe UI"/>
-              </a:defRPr>
-            </a:pPr>
-            <a:r>
-              <a:t>• Existing platforms (Meetup, BookMyShow) are strictly city-wide or commercial.</a:t>
-            </a:r>
-          </a:p>
-          <a:p>
-            <a:pPr>
-              <a:spcAft>
-                <a:spcPts val="800"/>
-              </a:spcAft>
-              <a:defRPr sz="1150">
-                <a:solidFill>
-                  <a:srgbClr val="F8FAFC"/>
-                </a:solidFill>
-                <a:latin typeface="Segoe UI"/>
-              </a:defRPr>
-            </a:pPr>
-            <a:r>
-              <a:t>• In mega-cities like Mumbai or Bangalore, a 'city-wide' event could be 35 km away in 2-hour traffic.</a:t>
-            </a:r>
-          </a:p>
-          <a:p>
-            <a:pPr>
-              <a:spcAft>
-                <a:spcPts val="800"/>
-              </a:spcAft>
-              <a:defRPr sz="1150">
-                <a:solidFill>
-                  <a:srgbClr val="F8FAFC"/>
-                </a:solidFill>
-                <a:latin typeface="Segoe UI"/>
-              </a:defRPr>
-            </a:pPr>
-            <a:r>
-              <a:t>• No platform answers: 'What tech or social events are within 5-10 km of me right now?'</a:t>
-            </a:r>
-          </a:p>
-          <a:p>
-            <a:pPr>
-              <a:spcAft>
-                <a:spcPts val="800"/>
-              </a:spcAft>
-              <a:defRPr sz="1150">
-                <a:solidFill>
-                  <a:srgbClr val="F8FAFC"/>
-                </a:solidFill>
-                <a:latin typeface="Segoe UI"/>
-              </a:defRPr>
-            </a:pPr>
-            <a:r>
-              <a:t>• Zero live GPS proximity filtering tuned for Indian urban transit.</a:t>
-            </a:r>
-          </a:p>
-        </p:txBody>
-      </p:sp>
-      <p:sp>
-        <p:nvSpPr>
-          <p:cNvPr id="11" name="Rounded Rectangle 10"/>
+          <p:cNvPr id="6" name="Rounded Rectangle 5"/>
           <p:cNvSpPr/>
           <p:nvPr/>
         </p:nvSpPr>
         <p:spPr>
           <a:xfrm>
-            <a:off x="8046720" y="1920240"/>
-            <a:ext cx="3383280" cy="4297680"/>
+            <a:off x="1005840" y="2103120"/>
+            <a:ext cx="731520" cy="73152"/>
           </a:xfrm>
           <a:prstGeom prst="roundRect">
             <a:avLst/>
           </a:prstGeom>
           <a:solidFill>
-            <a:srgbClr val="161C2D"/>
+            <a:srgbClr val="2563EB"/>
           </a:solidFill>
-          <a:ln w="12700">
-            <a:solidFill>
-              <a:srgbClr val="262E45"/>
-            </a:solidFill>
+          <a:ln>
+            <a:noFill/>
           </a:ln>
         </p:spPr>
         <p:style>
@@ -3591,14 +3318,14 @@
       </p:sp>
       <p:sp>
         <p:nvSpPr>
-          <p:cNvPr id="12" name="TextBox 11"/>
+          <p:cNvPr id="7" name="TextBox 6"/>
           <p:cNvSpPr txBox="1"/>
           <p:nvPr/>
         </p:nvSpPr>
         <p:spPr>
           <a:xfrm>
-            <a:off x="8229600" y="2103120"/>
-            <a:ext cx="3017520" cy="457200"/>
+            <a:off x="1005840" y="2286000"/>
+            <a:ext cx="4572000" cy="3749039"/>
           </a:xfrm>
           <a:prstGeom prst="rect">
             <a:avLst/>
@@ -3612,29 +3339,204 @@
           <a:lstStyle/>
           <a:p>
             <a:pPr>
-              <a:defRPr sz="1500" b="1">
-                <a:solidFill>
-                  <a:srgbClr val="3B82F6"/>
-                </a:solidFill>
-                <a:latin typeface="Segoe UI"/>
-              </a:defRPr>
-            </a:pPr>
-            <a:r>
-              <a:t>3. High Organizer Friction</a:t>
-            </a:r>
-          </a:p>
-        </p:txBody>
-      </p:sp>
-      <p:sp>
-        <p:nvSpPr>
-          <p:cNvPr id="13" name="TextBox 12"/>
+              <a:spcAft>
+                <a:spcPts val="800"/>
+              </a:spcAft>
+              <a:defRPr sz="1100" b="1">
+                <a:solidFill>
+                  <a:srgbClr val="2563EB"/>
+                </a:solidFill>
+                <a:latin typeface="Segoe UI"/>
+              </a:defRPr>
+            </a:pPr>
+            <a:r>
+              <a:t>PROJECT DETAILS</a:t>
+            </a:r>
+          </a:p>
+          <a:p>
+            <a:pPr>
+              <a:defRPr sz="1200" b="1">
+                <a:solidFill>
+                  <a:srgbClr val="0F172A"/>
+                </a:solidFill>
+                <a:latin typeface="Segoe UI"/>
+              </a:defRPr>
+            </a:pPr>
+            <a:r>
+              <a:t>• Problem Statement (PS) Title:</a:t>
+            </a:r>
+          </a:p>
+          <a:p>
+            <a:pPr>
+              <a:spcAft>
+                <a:spcPts val="1000"/>
+              </a:spcAft>
+              <a:defRPr sz="1200">
+                <a:solidFill>
+                  <a:srgbClr val="2563EB"/>
+                </a:solidFill>
+                <a:latin typeface="Segoe UI"/>
+              </a:defRPr>
+            </a:pPr>
+            <a:r>
+              <a:t>  Hyperlocal Event Discovery Platform (Event Radar)</a:t>
+            </a:r>
+          </a:p>
+          <a:p>
+            <a:pPr>
+              <a:defRPr sz="1200" b="1">
+                <a:solidFill>
+                  <a:srgbClr val="0F172A"/>
+                </a:solidFill>
+                <a:latin typeface="Segoe UI"/>
+              </a:defRPr>
+            </a:pPr>
+            <a:r>
+              <a:t>• Domain:</a:t>
+            </a:r>
+          </a:p>
+          <a:p>
+            <a:pPr>
+              <a:spcAft>
+                <a:spcPts val="1000"/>
+              </a:spcAft>
+              <a:defRPr sz="1150">
+                <a:solidFill>
+                  <a:srgbClr val="334155"/>
+                </a:solidFill>
+                <a:latin typeface="Segoe UI"/>
+              </a:defRPr>
+            </a:pPr>
+            <a:r>
+              <a:t>  Location-Based Services (LBS), Geospatial Systems &amp; Modern Web App</a:t>
+            </a:r>
+          </a:p>
+          <a:p>
+            <a:pPr>
+              <a:defRPr sz="1200" b="1">
+                <a:solidFill>
+                  <a:srgbClr val="0F172A"/>
+                </a:solidFill>
+                <a:latin typeface="Segoe UI"/>
+              </a:defRPr>
+            </a:pPr>
+            <a:r>
+              <a:t>• Live Deployed URL:</a:t>
+            </a:r>
+          </a:p>
+          <a:p>
+            <a:pPr>
+              <a:defRPr sz="1150">
+                <a:solidFill>
+                  <a:srgbClr val="059669"/>
+                </a:solidFill>
+                <a:latin typeface="Segoe UI"/>
+              </a:defRPr>
+            </a:pPr>
+            <a:r>
+              <a:t>  https://eventradar-mu.vercel.app</a:t>
+            </a:r>
+          </a:p>
+        </p:txBody>
+      </p:sp>
+      <p:sp>
+        <p:nvSpPr>
+          <p:cNvPr id="8" name="Rounded Rectangle 7"/>
+          <p:cNvSpPr/>
+          <p:nvPr/>
+        </p:nvSpPr>
+        <p:spPr>
+          <a:xfrm>
+            <a:off x="6217920" y="1920240"/>
+            <a:ext cx="5212080" cy="4297680"/>
+          </a:xfrm>
+          <a:prstGeom prst="roundRect">
+            <a:avLst/>
+          </a:prstGeom>
+          <a:solidFill>
+            <a:srgbClr val="FFFFFF"/>
+          </a:solidFill>
+          <a:ln w="12700">
+            <a:solidFill>
+              <a:srgbClr val="E2E8F0"/>
+            </a:solidFill>
+          </a:ln>
+        </p:spPr>
+        <p:style>
+          <a:lnRef idx="1">
+            <a:schemeClr val="accent1"/>
+          </a:lnRef>
+          <a:fillRef idx="3">
+            <a:schemeClr val="accent1"/>
+          </a:fillRef>
+          <a:effectRef idx="2">
+            <a:schemeClr val="accent1"/>
+          </a:effectRef>
+          <a:fontRef idx="minor">
+            <a:schemeClr val="lt1"/>
+          </a:fontRef>
+        </p:style>
+        <p:txBody>
+          <a:bodyPr rtlCol="0" anchor="ctr"/>
+          <a:lstStyle/>
+          <a:p>
+            <a:pPr algn="ctr"/>
+          </a:p>
+        </p:txBody>
+      </p:sp>
+      <p:sp>
+        <p:nvSpPr>
+          <p:cNvPr id="9" name="Rounded Rectangle 8"/>
+          <p:cNvSpPr/>
+          <p:nvPr/>
+        </p:nvSpPr>
+        <p:spPr>
+          <a:xfrm>
+            <a:off x="6492240" y="2103120"/>
+            <a:ext cx="731520" cy="73152"/>
+          </a:xfrm>
+          <a:prstGeom prst="roundRect">
+            <a:avLst/>
+          </a:prstGeom>
+          <a:solidFill>
+            <a:srgbClr val="7C3AED"/>
+          </a:solidFill>
+          <a:ln>
+            <a:noFill/>
+          </a:ln>
+        </p:spPr>
+        <p:style>
+          <a:lnRef idx="1">
+            <a:schemeClr val="accent1"/>
+          </a:lnRef>
+          <a:fillRef idx="3">
+            <a:schemeClr val="accent1"/>
+          </a:fillRef>
+          <a:effectRef idx="2">
+            <a:schemeClr val="accent1"/>
+          </a:effectRef>
+          <a:fontRef idx="minor">
+            <a:schemeClr val="lt1"/>
+          </a:fontRef>
+        </p:style>
+        <p:txBody>
+          <a:bodyPr rtlCol="0" anchor="ctr"/>
+          <a:lstStyle/>
+          <a:p>
+            <a:pPr algn="ctr"/>
+          </a:p>
+        </p:txBody>
+      </p:sp>
+      <p:sp>
+        <p:nvSpPr>
+          <p:cNvPr id="10" name="TextBox 9"/>
           <p:cNvSpPr txBox="1"/>
           <p:nvPr/>
         </p:nvSpPr>
         <p:spPr>
           <a:xfrm>
-            <a:off x="8229600" y="2560320"/>
-            <a:ext cx="3017520" cy="3520440"/>
+            <a:off x="6492240" y="2286000"/>
+            <a:ext cx="4663440" cy="3749039"/>
           </a:xfrm>
           <a:prstGeom prst="rect">
             <a:avLst/>
@@ -3651,15 +3553,15 @@
               <a:spcAft>
                 <a:spcPts val="800"/>
               </a:spcAft>
-              <a:defRPr sz="1150">
-                <a:solidFill>
-                  <a:srgbClr val="F8FAFC"/>
-                </a:solidFill>
-                <a:latin typeface="Segoe UI"/>
-              </a:defRPr>
-            </a:pPr>
-            <a:r>
-              <a:t>• Legacy platforms require complex coordinate lookups, approval queues, or steep subscription fees.</a:t>
+              <a:defRPr sz="1100" b="1">
+                <a:solidFill>
+                  <a:srgbClr val="7C3AED"/>
+                </a:solidFill>
+                <a:latin typeface="Segoe UI"/>
+              </a:defRPr>
+            </a:pPr>
+            <a:r>
+              <a:t>TEAM PROFILE</a:t>
             </a:r>
           </a:p>
           <a:p>
@@ -3667,15 +3569,15 @@
               <a:spcAft>
                 <a:spcPts val="800"/>
               </a:spcAft>
-              <a:defRPr sz="1150">
-                <a:solidFill>
-                  <a:srgbClr val="F8FAFC"/>
-                </a:solidFill>
-                <a:latin typeface="Segoe UI"/>
-              </a:defRPr>
-            </a:pPr>
-            <a:r>
-              <a:t>• Paid mapping APIs (Google Maps JS / Mapbox) create unsustainable hosting costs for free events.</a:t>
+              <a:defRPr sz="1400" b="1">
+                <a:solidFill>
+                  <a:srgbClr val="0F172A"/>
+                </a:solidFill>
+                <a:latin typeface="Segoe UI"/>
+              </a:defRPr>
+            </a:pPr>
+            <a:r>
+              <a:t>• Team Name:  VP Boys</a:t>
             </a:r>
           </a:p>
           <a:p>
@@ -3683,15 +3585,190 @@
               <a:spcAft>
                 <a:spcPts val="800"/>
               </a:spcAft>
-              <a:defRPr sz="1150">
-                <a:solidFill>
-                  <a:srgbClr val="F8FAFC"/>
-                </a:solidFill>
-                <a:latin typeface="Segoe UI"/>
-              </a:defRPr>
-            </a:pPr>
-            <a:r>
-              <a:t>• Our Understanding: A solution must combine instant GPS radius search with zero-friction event creation via plain Google Maps links.</a:t>
+              <a:defRPr sz="1200" b="1">
+                <a:solidFill>
+                  <a:srgbClr val="2563EB"/>
+                </a:solidFill>
+                <a:latin typeface="Segoe UI"/>
+              </a:defRPr>
+            </a:pPr>
+            <a:r>
+              <a:t>• Leader Name:  Shivanand Ramhari Varpe</a:t>
+            </a:r>
+          </a:p>
+          <a:p>
+            <a:pPr>
+              <a:defRPr sz="1200" b="1">
+                <a:solidFill>
+                  <a:srgbClr val="0F172A"/>
+                </a:solidFill>
+                <a:latin typeface="Segoe UI"/>
+              </a:defRPr>
+            </a:pPr>
+            <a:r>
+              <a:t>• Team Members:</a:t>
+            </a:r>
+          </a:p>
+          <a:p>
+            <a:pPr>
+              <a:spcAft>
+                <a:spcPts val="300"/>
+              </a:spcAft>
+              <a:defRPr sz="1100">
+                <a:solidFill>
+                  <a:srgbClr val="334155"/>
+                </a:solidFill>
+                <a:latin typeface="Segoe UI"/>
+              </a:defRPr>
+            </a:pPr>
+            <a:r>
+              <a:t>   1. Shivanand Ramhari Varpe  (Full-Stack Lead)</a:t>
+            </a:r>
+          </a:p>
+          <a:p>
+            <a:pPr>
+              <a:spcAft>
+                <a:spcPts val="300"/>
+              </a:spcAft>
+              <a:defRPr sz="1100">
+                <a:solidFill>
+                  <a:srgbClr val="334155"/>
+                </a:solidFill>
+                <a:latin typeface="Segoe UI"/>
+              </a:defRPr>
+            </a:pPr>
+            <a:r>
+              <a:t>   2. Suraj Rahul Vyavahare  (Backend &amp; Database)</a:t>
+            </a:r>
+          </a:p>
+          <a:p>
+            <a:pPr>
+              <a:spcAft>
+                <a:spcPts val="300"/>
+              </a:spcAft>
+              <a:defRPr sz="1100">
+                <a:solidFill>
+                  <a:srgbClr val="334155"/>
+                </a:solidFill>
+                <a:latin typeface="Segoe UI"/>
+              </a:defRPr>
+            </a:pPr>
+            <a:r>
+              <a:t>   3. Pranay Anil Shinde  (Testing &amp; Architecture)</a:t>
+            </a:r>
+          </a:p>
+        </p:txBody>
+      </p:sp>
+      <p:sp>
+        <p:nvSpPr>
+          <p:cNvPr id="11" name="Rounded Rectangle 10"/>
+          <p:cNvSpPr/>
+          <p:nvPr/>
+        </p:nvSpPr>
+        <p:spPr>
+          <a:xfrm>
+            <a:off x="6492240" y="5303520"/>
+            <a:ext cx="2194560" cy="640080"/>
+          </a:xfrm>
+          <a:prstGeom prst="roundRect">
+            <a:avLst/>
+          </a:prstGeom>
+          <a:solidFill>
+            <a:srgbClr val="0F172A"/>
+          </a:solidFill>
+          <a:ln>
+            <a:noFill/>
+          </a:ln>
+        </p:spPr>
+        <p:style>
+          <a:lnRef idx="1">
+            <a:schemeClr val="accent1"/>
+          </a:lnRef>
+          <a:fillRef idx="3">
+            <a:schemeClr val="accent1"/>
+          </a:fillRef>
+          <a:effectRef idx="2">
+            <a:schemeClr val="accent1"/>
+          </a:effectRef>
+          <a:fontRef idx="minor">
+            <a:schemeClr val="lt1"/>
+          </a:fontRef>
+        </p:style>
+        <p:txBody>
+          <a:bodyPr rtlCol="0" anchor="ctr"/>
+          <a:lstStyle/>
+          <a:p>
+            <a:pPr algn="ctr">
+              <a:defRPr sz="850">
+                <a:solidFill>
+                  <a:srgbClr val="FFFFFF"/>
+                </a:solidFill>
+                <a:latin typeface="Segoe UI"/>
+              </a:defRPr>
+            </a:pPr>
+            <a:r>
+              <a:t>GitHub Repository ↗</a:t>
+            </a:r>
+            <a:br/>
+            <a:r>
+              <a:t>github.com/Shivanand-Varpe/GeoGuild</a:t>
+            </a:r>
+          </a:p>
+        </p:txBody>
+      </p:sp>
+      <p:sp>
+        <p:nvSpPr>
+          <p:cNvPr id="12" name="Rounded Rectangle 11"/>
+          <p:cNvSpPr/>
+          <p:nvPr/>
+        </p:nvSpPr>
+        <p:spPr>
+          <a:xfrm>
+            <a:off x="8869680" y="5303520"/>
+            <a:ext cx="2286000" cy="640080"/>
+          </a:xfrm>
+          <a:prstGeom prst="roundRect">
+            <a:avLst/>
+          </a:prstGeom>
+          <a:solidFill>
+            <a:srgbClr val="E11D48"/>
+          </a:solidFill>
+          <a:ln>
+            <a:noFill/>
+          </a:ln>
+        </p:spPr>
+        <p:style>
+          <a:lnRef idx="1">
+            <a:schemeClr val="accent1"/>
+          </a:lnRef>
+          <a:fillRef idx="3">
+            <a:schemeClr val="accent1"/>
+          </a:fillRef>
+          <a:effectRef idx="2">
+            <a:schemeClr val="accent1"/>
+          </a:effectRef>
+          <a:fontRef idx="minor">
+            <a:schemeClr val="lt1"/>
+          </a:fontRef>
+        </p:style>
+        <p:txBody>
+          <a:bodyPr rtlCol="0" anchor="ctr"/>
+          <a:lstStyle/>
+          <a:p>
+            <a:pPr algn="ctr">
+              <a:defRPr sz="850">
+                <a:solidFill>
+                  <a:srgbClr val="FFFFFF"/>
+                </a:solidFill>
+                <a:latin typeface="Segoe UI"/>
+              </a:defRPr>
+            </a:pPr>
+            <a:r>
+              <a:t>Video Demo Link ↗</a:t>
+            </a:r>
+            <a:br/>
+            <a:r>
+              <a:t>youtu.be/EventRadar-Demo</a:t>
             </a:r>
           </a:p>
         </p:txBody>
@@ -3710,7 +3787,7 @@
     <p:bg>
       <p:bgPr>
         <a:solidFill>
-          <a:srgbClr val="0B0F19"/>
+          <a:srgbClr val="F8FAFC"/>
         </a:solidFill>
         <a:effectLst/>
       </p:bgPr>
@@ -3724,132 +3801,24 @@
       <p:grpSpPr/>
       <p:sp>
         <p:nvSpPr>
-          <p:cNvPr id="2" name="TextBox 1"/>
-          <p:cNvSpPr txBox="1"/>
-          <p:nvPr/>
-        </p:nvSpPr>
-        <p:spPr>
-          <a:xfrm>
-            <a:off x="731520" y="411480"/>
-            <a:ext cx="7315200" cy="320040"/>
-          </a:xfrm>
-          <a:prstGeom prst="rect">
-            <a:avLst/>
-          </a:prstGeom>
-          <a:noFill/>
-        </p:spPr>
-        <p:txBody>
-          <a:bodyPr wrap="square">
-            <a:spAutoFit/>
-          </a:bodyPr>
-          <a:lstStyle/>
-          <a:p>
-            <a:pPr>
-              <a:defRPr sz="1000" b="1">
-                <a:solidFill>
-                  <a:srgbClr val="06B6D4"/>
-                </a:solidFill>
-                <a:latin typeface="Segoe UI"/>
-              </a:defRPr>
-            </a:pPr>
-            <a:r>
-              <a:t>EVENT RADAR  •  SLIDE 02 OF 5  •  VECNAVERSE HACKATHON</a:t>
-            </a:r>
-          </a:p>
-        </p:txBody>
-      </p:sp>
-      <p:sp>
-        <p:nvSpPr>
-          <p:cNvPr id="3" name="TextBox 2"/>
-          <p:cNvSpPr txBox="1"/>
-          <p:nvPr/>
-        </p:nvSpPr>
-        <p:spPr>
-          <a:xfrm>
-            <a:off x="731520" y="685800"/>
-            <a:ext cx="10515600" cy="685800"/>
-          </a:xfrm>
-          <a:prstGeom prst="rect">
-            <a:avLst/>
-          </a:prstGeom>
-          <a:noFill/>
-        </p:spPr>
-        <p:txBody>
-          <a:bodyPr wrap="square">
-            <a:spAutoFit/>
-          </a:bodyPr>
-          <a:lstStyle/>
-          <a:p>
-            <a:pPr>
-              <a:defRPr sz="2600" b="1">
-                <a:solidFill>
-                  <a:srgbClr val="F8FAFC"/>
-                </a:solidFill>
-                <a:latin typeface="Segoe UI"/>
-              </a:defRPr>
-            </a:pPr>
-            <a:r>
-              <a:t>Technical Approach &amp; Architecture</a:t>
-            </a:r>
-          </a:p>
-        </p:txBody>
-      </p:sp>
-      <p:sp>
-        <p:nvSpPr>
-          <p:cNvPr id="4" name="TextBox 3"/>
-          <p:cNvSpPr txBox="1"/>
-          <p:nvPr/>
-        </p:nvSpPr>
-        <p:spPr>
-          <a:xfrm>
-            <a:off x="731520" y="1371600"/>
-            <a:ext cx="10515600" cy="411480"/>
-          </a:xfrm>
-          <a:prstGeom prst="rect">
-            <a:avLst/>
-          </a:prstGeom>
-          <a:noFill/>
-        </p:spPr>
-        <p:txBody>
-          <a:bodyPr wrap="square">
-            <a:spAutoFit/>
-          </a:bodyPr>
-          <a:lstStyle/>
-          <a:p>
-            <a:pPr>
-              <a:defRPr sz="1300">
-                <a:solidFill>
-                  <a:srgbClr val="94A3B8"/>
-                </a:solidFill>
-                <a:latin typeface="Segoe UI"/>
-              </a:defRPr>
-            </a:pPr>
-            <a:r>
-              <a:t>Production-grade Next.js 14 App Router paired with Supabase PostGIS spatial engine.</a:t>
-            </a:r>
-          </a:p>
-        </p:txBody>
-      </p:sp>
-      <p:sp>
-        <p:nvSpPr>
-          <p:cNvPr id="5" name="Rounded Rectangle 4"/>
+          <p:cNvPr id="2" name="Rounded Rectangle 1"/>
           <p:cNvSpPr/>
           <p:nvPr/>
         </p:nvSpPr>
         <p:spPr>
           <a:xfrm>
-            <a:off x="731520" y="1920240"/>
-            <a:ext cx="2514600" cy="4297680"/>
+            <a:off x="731520" y="384048"/>
+            <a:ext cx="3931920" cy="292608"/>
           </a:xfrm>
           <a:prstGeom prst="roundRect">
             <a:avLst/>
           </a:prstGeom>
           <a:solidFill>
-            <a:srgbClr val="161C2D"/>
+            <a:srgbClr val="EEF2FF"/>
           </a:solidFill>
           <a:ln w="12700">
             <a:solidFill>
-              <a:srgbClr val="262E45"/>
+              <a:srgbClr val="C7D2FE"/>
             </a:solidFill>
           </a:ln>
         </p:spPr>
@@ -3868,23 +3837,33 @@
           </a:fontRef>
         </p:style>
         <p:txBody>
-          <a:bodyPr rtlCol="0" anchor="ctr"/>
-          <a:lstStyle/>
-          <a:p>
-            <a:pPr algn="ctr"/>
-          </a:p>
-        </p:txBody>
-      </p:sp>
-      <p:sp>
-        <p:nvSpPr>
-          <p:cNvPr id="6" name="TextBox 5"/>
+          <a:bodyPr rtlCol="0" anchor="ctr" wrap="square"/>
+          <a:lstStyle/>
+          <a:p>
+            <a:pPr algn="ctr">
+              <a:defRPr sz="950" b="1">
+                <a:solidFill>
+                  <a:srgbClr val="2563EB"/>
+                </a:solidFill>
+                <a:latin typeface="Segoe UI"/>
+              </a:defRPr>
+            </a:pPr>
+            <a:r>
+              <a:t>EVENT RADAR  •  SLIDE 02 OF 6  •  TEAM VP BOYS</a:t>
+            </a:r>
+          </a:p>
+        </p:txBody>
+      </p:sp>
+      <p:sp>
+        <p:nvSpPr>
+          <p:cNvPr id="3" name="TextBox 2"/>
           <p:cNvSpPr txBox="1"/>
           <p:nvPr/>
         </p:nvSpPr>
         <p:spPr>
           <a:xfrm>
-            <a:off x="914400" y="2103120"/>
-            <a:ext cx="2148840" cy="457200"/>
+            <a:off x="731520" y="731520"/>
+            <a:ext cx="10698480" cy="621792"/>
           </a:xfrm>
           <a:prstGeom prst="rect">
             <a:avLst/>
@@ -3898,29 +3877,29 @@
           <a:lstStyle/>
           <a:p>
             <a:pPr>
-              <a:defRPr sz="1500" b="1">
-                <a:solidFill>
-                  <a:srgbClr val="3B82F6"/>
-                </a:solidFill>
-                <a:latin typeface="Segoe UI"/>
-              </a:defRPr>
-            </a:pPr>
-            <a:r>
-              <a:t>Frontend &amp; HIG UX</a:t>
-            </a:r>
-          </a:p>
-        </p:txBody>
-      </p:sp>
-      <p:sp>
-        <p:nvSpPr>
-          <p:cNvPr id="7" name="TextBox 6"/>
+              <a:defRPr sz="2600" b="1">
+                <a:solidFill>
+                  <a:srgbClr val="0F172A"/>
+                </a:solidFill>
+                <a:latin typeface="Segoe UI"/>
+              </a:defRPr>
+            </a:pPr>
+            <a:r>
+              <a:t>Problem Statement and Understanding</a:t>
+            </a:r>
+          </a:p>
+        </p:txBody>
+      </p:sp>
+      <p:sp>
+        <p:nvSpPr>
+          <p:cNvPr id="4" name="TextBox 3"/>
           <p:cNvSpPr txBox="1"/>
           <p:nvPr/>
         </p:nvSpPr>
         <p:spPr>
           <a:xfrm>
-            <a:off x="914400" y="2560320"/>
-            <a:ext cx="2148840" cy="3520440"/>
+            <a:off x="731520" y="1353312"/>
+            <a:ext cx="10698480" cy="384048"/>
           </a:xfrm>
           <a:prstGeom prst="rect">
             <a:avLst/>
@@ -3934,90 +3913,39 @@
           <a:lstStyle/>
           <a:p>
             <a:pPr>
-              <a:spcAft>
-                <a:spcPts val="800"/>
-              </a:spcAft>
-              <a:defRPr sz="1150">
-                <a:solidFill>
-                  <a:srgbClr val="F8FAFC"/>
-                </a:solidFill>
-                <a:latin typeface="Segoe UI"/>
-              </a:defRPr>
-            </a:pPr>
-            <a:r>
-              <a:t>• Next.js 14 App Router + TypeScript + Tailwind CSS v4.</a:t>
-            </a:r>
-          </a:p>
-          <a:p>
-            <a:pPr>
-              <a:spcAft>
-                <a:spcPts val="800"/>
-              </a:spcAft>
-              <a:defRPr sz="1150">
-                <a:solidFill>
-                  <a:srgbClr val="F8FAFC"/>
-                </a:solidFill>
-                <a:latin typeface="Segoe UI"/>
-              </a:defRPr>
-            </a:pPr>
-            <a:r>
-              <a:t>• Apple Human Interface Guidelines (HIG): Glassmorphism materials (blur 24px), tactile spring states.</a:t>
-            </a:r>
-          </a:p>
-          <a:p>
-            <a:pPr>
-              <a:spcAft>
-                <a:spcPts val="800"/>
-              </a:spcAft>
-              <a:defRPr sz="1150">
-                <a:solidFill>
-                  <a:srgbClr val="F8FAFC"/>
-                </a:solidFill>
-                <a:latin typeface="Segoe UI"/>
-              </a:defRPr>
-            </a:pPr>
-            <a:r>
-              <a:t>• WCAG AAA compliant light &amp; dark themes.</a:t>
-            </a:r>
-          </a:p>
-          <a:p>
-            <a:pPr>
-              <a:spcAft>
-                <a:spcPts val="800"/>
-              </a:spcAft>
-              <a:defRPr sz="1150">
-                <a:solidFill>
-                  <a:srgbClr val="F8FAFC"/>
-                </a:solidFill>
-                <a:latin typeface="Segoe UI"/>
-              </a:defRPr>
-            </a:pPr>
-            <a:r>
-              <a:t>• Client-side Haversine formula + Browser Geolocation for instant radius filtering.</a:t>
-            </a:r>
-          </a:p>
-        </p:txBody>
-      </p:sp>
-      <p:sp>
-        <p:nvSpPr>
-          <p:cNvPr id="8" name="Rounded Rectangle 7"/>
+              <a:defRPr sz="1300">
+                <a:solidFill>
+                  <a:srgbClr val="64748B"/>
+                </a:solidFill>
+                <a:latin typeface="Segoe UI"/>
+              </a:defRPr>
+            </a:pPr>
+            <a:r>
+              <a:t>India's urban centers house millions of tech builders, yet grassroots event discovery remains broken and fragmented.</a:t>
+            </a:r>
+          </a:p>
+        </p:txBody>
+      </p:sp>
+      <p:sp>
+        <p:nvSpPr>
+          <p:cNvPr id="5" name="Rounded Rectangle 4"/>
           <p:cNvSpPr/>
           <p:nvPr/>
         </p:nvSpPr>
         <p:spPr>
           <a:xfrm>
-            <a:off x="3474720" y="1920240"/>
-            <a:ext cx="2514600" cy="4297680"/>
+            <a:off x="731520" y="1920240"/>
+            <a:ext cx="3291840" cy="4297680"/>
           </a:xfrm>
           <a:prstGeom prst="roundRect">
             <a:avLst/>
           </a:prstGeom>
           <a:solidFill>
-            <a:srgbClr val="161C2D"/>
+            <a:srgbClr val="FFFFFF"/>
           </a:solidFill>
           <a:ln w="12700">
             <a:solidFill>
-              <a:srgbClr val="262E45"/>
+              <a:srgbClr val="E2E8F0"/>
             </a:solidFill>
           </a:ln>
         </p:spPr>
@@ -4045,148 +3973,23 @@
       </p:sp>
       <p:sp>
         <p:nvSpPr>
-          <p:cNvPr id="9" name="TextBox 8"/>
-          <p:cNvSpPr txBox="1"/>
-          <p:nvPr/>
-        </p:nvSpPr>
-        <p:spPr>
-          <a:xfrm>
-            <a:off x="3657600" y="2103120"/>
-            <a:ext cx="2148840" cy="457200"/>
-          </a:xfrm>
-          <a:prstGeom prst="rect">
-            <a:avLst/>
-          </a:prstGeom>
-          <a:noFill/>
-        </p:spPr>
-        <p:txBody>
-          <a:bodyPr wrap="square">
-            <a:spAutoFit/>
-          </a:bodyPr>
-          <a:lstStyle/>
-          <a:p>
-            <a:pPr>
-              <a:defRPr sz="1500" b="1">
-                <a:solidFill>
-                  <a:srgbClr val="10B981"/>
-                </a:solidFill>
-                <a:latin typeface="Segoe UI"/>
-              </a:defRPr>
-            </a:pPr>
-            <a:r>
-              <a:t>PostGIS Spatial DB</a:t>
-            </a:r>
-          </a:p>
-        </p:txBody>
-      </p:sp>
-      <p:sp>
-        <p:nvSpPr>
-          <p:cNvPr id="10" name="TextBox 9"/>
-          <p:cNvSpPr txBox="1"/>
-          <p:nvPr/>
-        </p:nvSpPr>
-        <p:spPr>
-          <a:xfrm>
-            <a:off x="3657600" y="2560320"/>
-            <a:ext cx="2148840" cy="3520440"/>
-          </a:xfrm>
-          <a:prstGeom prst="rect">
-            <a:avLst/>
-          </a:prstGeom>
-          <a:noFill/>
-        </p:spPr>
-        <p:txBody>
-          <a:bodyPr wrap="square">
-            <a:spAutoFit/>
-          </a:bodyPr>
-          <a:lstStyle/>
-          <a:p>
-            <a:pPr>
-              <a:spcAft>
-                <a:spcPts val="800"/>
-              </a:spcAft>
-              <a:defRPr sz="1150">
-                <a:solidFill>
-                  <a:srgbClr val="F8FAFC"/>
-                </a:solidFill>
-                <a:latin typeface="Segoe UI"/>
-              </a:defRPr>
-            </a:pPr>
-            <a:r>
-              <a:t>• Supabase PostgreSQL equipped with the PostGIS spatial engine.</a:t>
-            </a:r>
-          </a:p>
-          <a:p>
-            <a:pPr>
-              <a:spcAft>
-                <a:spcPts val="800"/>
-              </a:spcAft>
-              <a:defRPr sz="1150">
-                <a:solidFill>
-                  <a:srgbClr val="F8FAFC"/>
-                </a:solidFill>
-                <a:latin typeface="Segoe UI"/>
-              </a:defRPr>
-            </a:pPr>
-            <a:r>
-              <a:t>• RPC function 'get_nearby_events' utilizing ST_DWithin &amp; ST_Distance spherical math.</a:t>
-            </a:r>
-          </a:p>
-          <a:p>
-            <a:pPr>
-              <a:spcAft>
-                <a:spcPts val="800"/>
-              </a:spcAft>
-              <a:defRPr sz="1150">
-                <a:solidFill>
-                  <a:srgbClr val="F8FAFC"/>
-                </a:solidFill>
-                <a:latin typeface="Segoe UI"/>
-              </a:defRPr>
-            </a:pPr>
-            <a:r>
-              <a:t>• GiST spatial indexes on geography(Point, 4326) for sub-50ms query latency at scale.</a:t>
-            </a:r>
-          </a:p>
-          <a:p>
-            <a:pPr>
-              <a:spcAft>
-                <a:spcPts val="800"/>
-              </a:spcAft>
-              <a:defRPr sz="1150">
-                <a:solidFill>
-                  <a:srgbClr val="F8FAFC"/>
-                </a:solidFill>
-                <a:latin typeface="Segoe UI"/>
-              </a:defRPr>
-            </a:pPr>
-            <a:r>
-              <a:t>• Native city coordinate centroids for 5 major Indian metros.</a:t>
-            </a:r>
-          </a:p>
-        </p:txBody>
-      </p:sp>
-      <p:sp>
-        <p:nvSpPr>
-          <p:cNvPr id="11" name="Rounded Rectangle 10"/>
+          <p:cNvPr id="6" name="Rounded Rectangle 5"/>
           <p:cNvSpPr/>
           <p:nvPr/>
         </p:nvSpPr>
         <p:spPr>
           <a:xfrm>
-            <a:off x="6217920" y="1920240"/>
-            <a:ext cx="2514600" cy="4297680"/>
+            <a:off x="914400" y="2084832"/>
+            <a:ext cx="548640" cy="73152"/>
           </a:xfrm>
           <a:prstGeom prst="roundRect">
             <a:avLst/>
           </a:prstGeom>
           <a:solidFill>
-            <a:srgbClr val="161C2D"/>
+            <a:srgbClr val="7C3AED"/>
           </a:solidFill>
-          <a:ln w="12700">
-            <a:solidFill>
-              <a:srgbClr val="262E45"/>
-            </a:solidFill>
+          <a:ln>
+            <a:noFill/>
           </a:ln>
         </p:spPr>
         <p:style>
@@ -4213,14 +4016,14 @@
       </p:sp>
       <p:sp>
         <p:nvSpPr>
-          <p:cNvPr id="12" name="TextBox 11"/>
+          <p:cNvPr id="7" name="TextBox 6"/>
           <p:cNvSpPr txBox="1"/>
           <p:nvPr/>
         </p:nvSpPr>
         <p:spPr>
           <a:xfrm>
-            <a:off x="6400800" y="2103120"/>
-            <a:ext cx="2148840" cy="457200"/>
+            <a:off x="914400" y="2212848"/>
+            <a:ext cx="2926080" cy="502920"/>
           </a:xfrm>
           <a:prstGeom prst="rect">
             <a:avLst/>
@@ -4236,27 +4039,27 @@
             <a:pPr>
               <a:defRPr sz="1500" b="1">
                 <a:solidFill>
-                  <a:srgbClr val="06B6D4"/>
-                </a:solidFill>
-                <a:latin typeface="Segoe UI"/>
-              </a:defRPr>
-            </a:pPr>
-            <a:r>
-              <a:t>Maps Link Parser</a:t>
-            </a:r>
-          </a:p>
-        </p:txBody>
-      </p:sp>
-      <p:sp>
-        <p:nvSpPr>
-          <p:cNvPr id="13" name="TextBox 12"/>
+                  <a:srgbClr val="0F172A"/>
+                </a:solidFill>
+                <a:latin typeface="Segoe UI"/>
+              </a:defRPr>
+            </a:pPr>
+            <a:r>
+              <a:t>1. Fragmented Discovery</a:t>
+            </a:r>
+          </a:p>
+        </p:txBody>
+      </p:sp>
+      <p:sp>
+        <p:nvSpPr>
+          <p:cNvPr id="8" name="TextBox 7"/>
           <p:cNvSpPr txBox="1"/>
           <p:nvPr/>
         </p:nvSpPr>
         <p:spPr>
           <a:xfrm>
-            <a:off x="6400800" y="2560320"/>
-            <a:ext cx="2148840" cy="3520440"/>
+            <a:off x="914400" y="2724912"/>
+            <a:ext cx="2926080" cy="3383280"/>
           </a:xfrm>
           <a:prstGeom prst="rect">
             <a:avLst/>
@@ -4271,89 +4074,89 @@
           <a:p>
             <a:pPr>
               <a:spcAft>
-                <a:spcPts val="800"/>
+                <a:spcPts val="700"/>
               </a:spcAft>
               <a:defRPr sz="1150">
                 <a:solidFill>
-                  <a:srgbClr val="F8FAFC"/>
-                </a:solidFill>
-                <a:latin typeface="Segoe UI"/>
-              </a:defRPr>
-            </a:pPr>
-            <a:r>
-              <a:t>• Proprietary regex parser in lib/maps.ts.</a:t>
+                  <a:srgbClr val="334155"/>
+                </a:solidFill>
+                <a:latin typeface="Segoe UI"/>
+              </a:defRPr>
+            </a:pPr>
+            <a:r>
+              <a:t>• 85%+ of tech meetups, hackathons, and cultural jams live in closed WhatsApp groups or disappearing Instagram stories.</a:t>
             </a:r>
           </a:p>
           <a:p>
             <a:pPr>
               <a:spcAft>
-                <a:spcPts val="800"/>
+                <a:spcPts val="700"/>
               </a:spcAft>
               <a:defRPr sz="1150">
                 <a:solidFill>
-                  <a:srgbClr val="F8FAFC"/>
-                </a:solidFill>
-                <a:latin typeface="Segoe UI"/>
-              </a:defRPr>
-            </a:pPr>
-            <a:r>
-              <a:t>• Organizers paste ANY Google Maps link (place, venue pin, directions, or coordinates).</a:t>
+                  <a:srgbClr val="334155"/>
+                </a:solidFill>
+                <a:latin typeface="Segoe UI"/>
+              </a:defRPr>
+            </a:pPr>
+            <a:r>
+              <a:t>• Zero unified directory for spontaneous, neighborhood gatherings.</a:t>
             </a:r>
           </a:p>
           <a:p>
             <a:pPr>
               <a:spcAft>
-                <a:spcPts val="800"/>
+                <a:spcPts val="700"/>
               </a:spcAft>
               <a:defRPr sz="1150">
                 <a:solidFill>
-                  <a:srgbClr val="F8FAFC"/>
-                </a:solidFill>
-                <a:latin typeface="Segoe UI"/>
-              </a:defRPr>
-            </a:pPr>
-            <a:r>
-              <a:t>• Extracts lat/lng without paid Geocoding APIs, saving 100% of mapping API costs.</a:t>
+                  <a:srgbClr val="334155"/>
+                </a:solidFill>
+                <a:latin typeface="Segoe UI"/>
+              </a:defRPr>
+            </a:pPr>
+            <a:r>
+              <a:t>• High opportunity cost: Builders miss key networking happening 2 km away.</a:t>
             </a:r>
           </a:p>
           <a:p>
             <a:pPr>
               <a:spcAft>
-                <a:spcPts val="800"/>
+                <a:spcPts val="700"/>
               </a:spcAft>
               <a:defRPr sz="1150">
                 <a:solidFill>
-                  <a:srgbClr val="F8FAFC"/>
-                </a:solidFill>
-                <a:latin typeface="Segoe UI"/>
-              </a:defRPr>
-            </a:pPr>
-            <a:r>
-              <a:t>• Generates direct turn-by-turn navigation URLs (maps.google.com?q=lat,lng).</a:t>
-            </a:r>
-          </a:p>
-        </p:txBody>
-      </p:sp>
-      <p:sp>
-        <p:nvSpPr>
-          <p:cNvPr id="14" name="Rounded Rectangle 13"/>
+                  <a:srgbClr val="334155"/>
+                </a:solidFill>
+                <a:latin typeface="Segoe UI"/>
+              </a:defRPr>
+            </a:pPr>
+            <a:r>
+              <a:t>• Zero discoverability for first-time or indie community organizers.</a:t>
+            </a:r>
+          </a:p>
+        </p:txBody>
+      </p:sp>
+      <p:sp>
+        <p:nvSpPr>
+          <p:cNvPr id="9" name="Rounded Rectangle 8"/>
           <p:cNvSpPr/>
           <p:nvPr/>
         </p:nvSpPr>
         <p:spPr>
           <a:xfrm>
-            <a:off x="8961120" y="1920240"/>
-            <a:ext cx="2514600" cy="4297680"/>
+            <a:off x="4389120" y="1920240"/>
+            <a:ext cx="3291840" cy="4297680"/>
           </a:xfrm>
           <a:prstGeom prst="roundRect">
             <a:avLst/>
           </a:prstGeom>
           <a:solidFill>
-            <a:srgbClr val="161C2D"/>
+            <a:srgbClr val="FFFFFF"/>
           </a:solidFill>
           <a:ln w="12700">
             <a:solidFill>
-              <a:srgbClr val="262E45"/>
+              <a:srgbClr val="E2E8F0"/>
             </a:solidFill>
           </a:ln>
         </p:spPr>
@@ -4381,14 +4184,57 @@
       </p:sp>
       <p:sp>
         <p:nvSpPr>
-          <p:cNvPr id="15" name="TextBox 14"/>
+          <p:cNvPr id="10" name="Rounded Rectangle 9"/>
+          <p:cNvSpPr/>
+          <p:nvPr/>
+        </p:nvSpPr>
+        <p:spPr>
+          <a:xfrm>
+            <a:off x="4572000" y="2084832"/>
+            <a:ext cx="548640" cy="73152"/>
+          </a:xfrm>
+          <a:prstGeom prst="roundRect">
+            <a:avLst/>
+          </a:prstGeom>
+          <a:solidFill>
+            <a:srgbClr val="0284C7"/>
+          </a:solidFill>
+          <a:ln>
+            <a:noFill/>
+          </a:ln>
+        </p:spPr>
+        <p:style>
+          <a:lnRef idx="1">
+            <a:schemeClr val="accent1"/>
+          </a:lnRef>
+          <a:fillRef idx="3">
+            <a:schemeClr val="accent1"/>
+          </a:fillRef>
+          <a:effectRef idx="2">
+            <a:schemeClr val="accent1"/>
+          </a:effectRef>
+          <a:fontRef idx="minor">
+            <a:schemeClr val="lt1"/>
+          </a:fontRef>
+        </p:style>
+        <p:txBody>
+          <a:bodyPr rtlCol="0" anchor="ctr"/>
+          <a:lstStyle/>
+          <a:p>
+            <a:pPr algn="ctr"/>
+          </a:p>
+        </p:txBody>
+      </p:sp>
+      <p:sp>
+        <p:nvSpPr>
+          <p:cNvPr id="11" name="TextBox 10"/>
           <p:cNvSpPr txBox="1"/>
           <p:nvPr/>
         </p:nvSpPr>
         <p:spPr>
           <a:xfrm>
-            <a:off x="9144000" y="2103120"/>
-            <a:ext cx="2148840" cy="457200"/>
+            <a:off x="4572000" y="2212848"/>
+            <a:ext cx="2926080" cy="502920"/>
           </a:xfrm>
           <a:prstGeom prst="rect">
             <a:avLst/>
@@ -4404,27 +4250,27 @@
             <a:pPr>
               <a:defRPr sz="1500" b="1">
                 <a:solidFill>
-                  <a:srgbClr val="A855F7"/>
-                </a:solidFill>
-                <a:latin typeface="Segoe UI"/>
-              </a:defRPr>
-            </a:pPr>
-            <a:r>
-              <a:t>Auth &amp; Real Payments</a:t>
-            </a:r>
-          </a:p>
-        </p:txBody>
-      </p:sp>
-      <p:sp>
-        <p:nvSpPr>
-          <p:cNvPr id="16" name="TextBox 15"/>
+                  <a:srgbClr val="0F172A"/>
+                </a:solidFill>
+                <a:latin typeface="Segoe UI"/>
+              </a:defRPr>
+            </a:pPr>
+            <a:r>
+              <a:t>2. The 'Hyperlocal' Void</a:t>
+            </a:r>
+          </a:p>
+        </p:txBody>
+      </p:sp>
+      <p:sp>
+        <p:nvSpPr>
+          <p:cNvPr id="12" name="TextBox 11"/>
           <p:cNvSpPr txBox="1"/>
           <p:nvPr/>
         </p:nvSpPr>
         <p:spPr>
           <a:xfrm>
-            <a:off x="9144000" y="2560320"/>
-            <a:ext cx="2148840" cy="3520440"/>
+            <a:off x="4572000" y="2724912"/>
+            <a:ext cx="2926080" cy="3383280"/>
           </a:xfrm>
           <a:prstGeom prst="rect">
             <a:avLst/>
@@ -4439,65 +4285,260 @@
           <a:p>
             <a:pPr>
               <a:spcAft>
-                <a:spcPts val="800"/>
+                <a:spcPts val="700"/>
               </a:spcAft>
               <a:defRPr sz="1150">
                 <a:solidFill>
-                  <a:srgbClr val="F8FAFC"/>
-                </a:solidFill>
-                <a:latin typeface="Segoe UI"/>
-              </a:defRPr>
-            </a:pPr>
-            <a:r>
-              <a:t>• Supabase Auth with Email OTP, Password, and OAuth.</a:t>
+                  <a:srgbClr val="334155"/>
+                </a:solidFill>
+                <a:latin typeface="Segoe UI"/>
+              </a:defRPr>
+            </a:pPr>
+            <a:r>
+              <a:t>• Existing platforms (Meetup, BookMyShow) are strictly city-wide or commercial.</a:t>
             </a:r>
           </a:p>
           <a:p>
             <a:pPr>
               <a:spcAft>
-                <a:spcPts val="800"/>
+                <a:spcPts val="700"/>
               </a:spcAft>
               <a:defRPr sz="1150">
                 <a:solidFill>
-                  <a:srgbClr val="F8FAFC"/>
-                </a:solidFill>
-                <a:latin typeface="Segoe UI"/>
-              </a:defRPr>
-            </a:pPr>
-            <a:r>
-              <a:t>• Row-Level Security (RLS) protecting RSVPs, events, and community walls.</a:t>
+                  <a:srgbClr val="334155"/>
+                </a:solidFill>
+                <a:latin typeface="Segoe UI"/>
+              </a:defRPr>
+            </a:pPr>
+            <a:r>
+              <a:t>• In mega-cities like Mumbai or Bangalore, a 'city-wide' event could be 35 km away in 2-hour traffic.</a:t>
             </a:r>
           </a:p>
           <a:p>
             <a:pPr>
               <a:spcAft>
-                <a:spcPts val="800"/>
+                <a:spcPts val="700"/>
               </a:spcAft>
               <a:defRPr sz="1150">
                 <a:solidFill>
-                  <a:srgbClr val="F8FAFC"/>
-                </a:solidFill>
-                <a:latin typeface="Segoe UI"/>
-              </a:defRPr>
-            </a:pPr>
-            <a:r>
-              <a:t>• Integrated Apple-styled checkout supporting UPI, Cards, and Netbanking.</a:t>
+                  <a:srgbClr val="334155"/>
+                </a:solidFill>
+                <a:latin typeface="Segoe UI"/>
+              </a:defRPr>
+            </a:pPr>
+            <a:r>
+              <a:t>• No platform answers: 'What tech or social events are within 5-10 km of me right now?'</a:t>
             </a:r>
           </a:p>
           <a:p>
             <a:pPr>
               <a:spcAft>
-                <a:spcPts val="800"/>
+                <a:spcPts val="700"/>
               </a:spcAft>
               <a:defRPr sz="1150">
                 <a:solidFill>
-                  <a:srgbClr val="F8FAFC"/>
-                </a:solidFill>
-                <a:latin typeface="Segoe UI"/>
-              </a:defRPr>
-            </a:pPr>
-            <a:r>
-              <a:t>• Real-time QR Digital Ticket generation and iCal / Google Calendar export.</a:t>
+                  <a:srgbClr val="334155"/>
+                </a:solidFill>
+                <a:latin typeface="Segoe UI"/>
+              </a:defRPr>
+            </a:pPr>
+            <a:r>
+              <a:t>• Zero live GPS proximity filtering calibrated for Indian urban commutes.</a:t>
+            </a:r>
+          </a:p>
+        </p:txBody>
+      </p:sp>
+      <p:sp>
+        <p:nvSpPr>
+          <p:cNvPr id="13" name="Rounded Rectangle 12"/>
+          <p:cNvSpPr/>
+          <p:nvPr/>
+        </p:nvSpPr>
+        <p:spPr>
+          <a:xfrm>
+            <a:off x="8046720" y="1920240"/>
+            <a:ext cx="3383280" cy="4297680"/>
+          </a:xfrm>
+          <a:prstGeom prst="roundRect">
+            <a:avLst/>
+          </a:prstGeom>
+          <a:solidFill>
+            <a:srgbClr val="FFFFFF"/>
+          </a:solidFill>
+          <a:ln w="12700">
+            <a:solidFill>
+              <a:srgbClr val="E2E8F0"/>
+            </a:solidFill>
+          </a:ln>
+        </p:spPr>
+        <p:style>
+          <a:lnRef idx="1">
+            <a:schemeClr val="accent1"/>
+          </a:lnRef>
+          <a:fillRef idx="3">
+            <a:schemeClr val="accent1"/>
+          </a:fillRef>
+          <a:effectRef idx="2">
+            <a:schemeClr val="accent1"/>
+          </a:effectRef>
+          <a:fontRef idx="minor">
+            <a:schemeClr val="lt1"/>
+          </a:fontRef>
+        </p:style>
+        <p:txBody>
+          <a:bodyPr rtlCol="0" anchor="ctr"/>
+          <a:lstStyle/>
+          <a:p>
+            <a:pPr algn="ctr"/>
+          </a:p>
+        </p:txBody>
+      </p:sp>
+      <p:sp>
+        <p:nvSpPr>
+          <p:cNvPr id="14" name="Rounded Rectangle 13"/>
+          <p:cNvSpPr/>
+          <p:nvPr/>
+        </p:nvSpPr>
+        <p:spPr>
+          <a:xfrm>
+            <a:off x="8229600" y="2084832"/>
+            <a:ext cx="548640" cy="73152"/>
+          </a:xfrm>
+          <a:prstGeom prst="roundRect">
+            <a:avLst/>
+          </a:prstGeom>
+          <a:solidFill>
+            <a:srgbClr val="2563EB"/>
+          </a:solidFill>
+          <a:ln>
+            <a:noFill/>
+          </a:ln>
+        </p:spPr>
+        <p:style>
+          <a:lnRef idx="1">
+            <a:schemeClr val="accent1"/>
+          </a:lnRef>
+          <a:fillRef idx="3">
+            <a:schemeClr val="accent1"/>
+          </a:fillRef>
+          <a:effectRef idx="2">
+            <a:schemeClr val="accent1"/>
+          </a:effectRef>
+          <a:fontRef idx="minor">
+            <a:schemeClr val="lt1"/>
+          </a:fontRef>
+        </p:style>
+        <p:txBody>
+          <a:bodyPr rtlCol="0" anchor="ctr"/>
+          <a:lstStyle/>
+          <a:p>
+            <a:pPr algn="ctr"/>
+          </a:p>
+        </p:txBody>
+      </p:sp>
+      <p:sp>
+        <p:nvSpPr>
+          <p:cNvPr id="15" name="TextBox 14"/>
+          <p:cNvSpPr txBox="1"/>
+          <p:nvPr/>
+        </p:nvSpPr>
+        <p:spPr>
+          <a:xfrm>
+            <a:off x="8229600" y="2212848"/>
+            <a:ext cx="3017520" cy="502920"/>
+          </a:xfrm>
+          <a:prstGeom prst="rect">
+            <a:avLst/>
+          </a:prstGeom>
+          <a:noFill/>
+        </p:spPr>
+        <p:txBody>
+          <a:bodyPr wrap="square">
+            <a:spAutoFit/>
+          </a:bodyPr>
+          <a:lstStyle/>
+          <a:p>
+            <a:pPr>
+              <a:defRPr sz="1500" b="1">
+                <a:solidFill>
+                  <a:srgbClr val="0F172A"/>
+                </a:solidFill>
+                <a:latin typeface="Segoe UI"/>
+              </a:defRPr>
+            </a:pPr>
+            <a:r>
+              <a:t>3. High Organizer Friction</a:t>
+            </a:r>
+          </a:p>
+        </p:txBody>
+      </p:sp>
+      <p:sp>
+        <p:nvSpPr>
+          <p:cNvPr id="16" name="TextBox 15"/>
+          <p:cNvSpPr txBox="1"/>
+          <p:nvPr/>
+        </p:nvSpPr>
+        <p:spPr>
+          <a:xfrm>
+            <a:off x="8229600" y="2724912"/>
+            <a:ext cx="3017520" cy="3383280"/>
+          </a:xfrm>
+          <a:prstGeom prst="rect">
+            <a:avLst/>
+          </a:prstGeom>
+          <a:noFill/>
+        </p:spPr>
+        <p:txBody>
+          <a:bodyPr wrap="square">
+            <a:spAutoFit/>
+          </a:bodyPr>
+          <a:lstStyle/>
+          <a:p>
+            <a:pPr>
+              <a:spcAft>
+                <a:spcPts val="700"/>
+              </a:spcAft>
+              <a:defRPr sz="1150">
+                <a:solidFill>
+                  <a:srgbClr val="334155"/>
+                </a:solidFill>
+                <a:latin typeface="Segoe UI"/>
+              </a:defRPr>
+            </a:pPr>
+            <a:r>
+              <a:t>• Legacy platforms require complex coordinate lookups, approval queues, or steep subscription fees ($35+/mo).</a:t>
+            </a:r>
+          </a:p>
+          <a:p>
+            <a:pPr>
+              <a:spcAft>
+                <a:spcPts val="700"/>
+              </a:spcAft>
+              <a:defRPr sz="1150">
+                <a:solidFill>
+                  <a:srgbClr val="334155"/>
+                </a:solidFill>
+                <a:latin typeface="Segoe UI"/>
+              </a:defRPr>
+            </a:pPr>
+            <a:r>
+              <a:t>• Paid mapping APIs (Google Maps JS / Mapbox) create unsustainable hosting costs for free events.</a:t>
+            </a:r>
+          </a:p>
+          <a:p>
+            <a:pPr>
+              <a:spcAft>
+                <a:spcPts val="700"/>
+              </a:spcAft>
+              <a:defRPr sz="1150">
+                <a:solidFill>
+                  <a:srgbClr val="334155"/>
+                </a:solidFill>
+                <a:latin typeface="Segoe UI"/>
+              </a:defRPr>
+            </a:pPr>
+            <a:r>
+              <a:t>• Our Understanding: A solution must combine instant GPS radius search with zero-friction event creation via plain Google Maps links.</a:t>
             </a:r>
           </a:p>
         </p:txBody>
@@ -4516,7 +4557,7 @@
     <p:bg>
       <p:bgPr>
         <a:solidFill>
-          <a:srgbClr val="0B0F19"/>
+          <a:srgbClr val="F8FAFC"/>
         </a:solidFill>
         <a:effectLst/>
       </p:bgPr>
@@ -4530,132 +4571,24 @@
       <p:grpSpPr/>
       <p:sp>
         <p:nvSpPr>
-          <p:cNvPr id="2" name="TextBox 1"/>
-          <p:cNvSpPr txBox="1"/>
-          <p:nvPr/>
-        </p:nvSpPr>
-        <p:spPr>
-          <a:xfrm>
-            <a:off x="731520" y="411480"/>
-            <a:ext cx="7315200" cy="320040"/>
-          </a:xfrm>
-          <a:prstGeom prst="rect">
-            <a:avLst/>
-          </a:prstGeom>
-          <a:noFill/>
-        </p:spPr>
-        <p:txBody>
-          <a:bodyPr wrap="square">
-            <a:spAutoFit/>
-          </a:bodyPr>
-          <a:lstStyle/>
-          <a:p>
-            <a:pPr>
-              <a:defRPr sz="1000" b="1">
-                <a:solidFill>
-                  <a:srgbClr val="06B6D4"/>
-                </a:solidFill>
-                <a:latin typeface="Segoe UI"/>
-              </a:defRPr>
-            </a:pPr>
-            <a:r>
-              <a:t>EVENT RADAR  •  SLIDE 03 OF 5  •  VECNAVERSE HACKATHON</a:t>
-            </a:r>
-          </a:p>
-        </p:txBody>
-      </p:sp>
-      <p:sp>
-        <p:nvSpPr>
-          <p:cNvPr id="3" name="TextBox 2"/>
-          <p:cNvSpPr txBox="1"/>
-          <p:nvPr/>
-        </p:nvSpPr>
-        <p:spPr>
-          <a:xfrm>
-            <a:off x="731520" y="685800"/>
-            <a:ext cx="10515600" cy="685800"/>
-          </a:xfrm>
-          <a:prstGeom prst="rect">
-            <a:avLst/>
-          </a:prstGeom>
-          <a:noFill/>
-        </p:spPr>
-        <p:txBody>
-          <a:bodyPr wrap="square">
-            <a:spAutoFit/>
-          </a:bodyPr>
-          <a:lstStyle/>
-          <a:p>
-            <a:pPr>
-              <a:defRPr sz="2600" b="1">
-                <a:solidFill>
-                  <a:srgbClr val="F8FAFC"/>
-                </a:solidFill>
-                <a:latin typeface="Segoe UI"/>
-              </a:defRPr>
-            </a:pPr>
-            <a:r>
-              <a:t>Feasibility &amp; Commercial Viability</a:t>
-            </a:r>
-          </a:p>
-        </p:txBody>
-      </p:sp>
-      <p:sp>
-        <p:nvSpPr>
-          <p:cNvPr id="4" name="TextBox 3"/>
-          <p:cNvSpPr txBox="1"/>
-          <p:nvPr/>
-        </p:nvSpPr>
-        <p:spPr>
-          <a:xfrm>
-            <a:off x="731520" y="1371600"/>
-            <a:ext cx="10515600" cy="411480"/>
-          </a:xfrm>
-          <a:prstGeom prst="rect">
-            <a:avLst/>
-          </a:prstGeom>
-          <a:noFill/>
-        </p:spPr>
-        <p:txBody>
-          <a:bodyPr wrap="square">
-            <a:spAutoFit/>
-          </a:bodyPr>
-          <a:lstStyle/>
-          <a:p>
-            <a:pPr>
-              <a:defRPr sz="1300">
-                <a:solidFill>
-                  <a:srgbClr val="94A3B8"/>
-                </a:solidFill>
-                <a:latin typeface="Segoe UI"/>
-              </a:defRPr>
-            </a:pPr>
-            <a:r>
-              <a:t>Zero-cost operational overhead combined with sustainable, community-first monetization.</a:t>
-            </a:r>
-          </a:p>
-        </p:txBody>
-      </p:sp>
-      <p:sp>
-        <p:nvSpPr>
-          <p:cNvPr id="5" name="Rounded Rectangle 4"/>
+          <p:cNvPr id="2" name="Rounded Rectangle 1"/>
           <p:cNvSpPr/>
           <p:nvPr/>
         </p:nvSpPr>
         <p:spPr>
           <a:xfrm>
-            <a:off x="731520" y="1920240"/>
-            <a:ext cx="3291840" cy="4297680"/>
+            <a:off x="731520" y="384048"/>
+            <a:ext cx="3931920" cy="292608"/>
           </a:xfrm>
           <a:prstGeom prst="roundRect">
             <a:avLst/>
           </a:prstGeom>
           <a:solidFill>
-            <a:srgbClr val="161C2D"/>
+            <a:srgbClr val="EEF2FF"/>
           </a:solidFill>
           <a:ln w="12700">
             <a:solidFill>
-              <a:srgbClr val="262E45"/>
+              <a:srgbClr val="C7D2FE"/>
             </a:solidFill>
           </a:ln>
         </p:spPr>
@@ -4674,23 +4607,33 @@
           </a:fontRef>
         </p:style>
         <p:txBody>
-          <a:bodyPr rtlCol="0" anchor="ctr"/>
-          <a:lstStyle/>
-          <a:p>
-            <a:pPr algn="ctr"/>
-          </a:p>
-        </p:txBody>
-      </p:sp>
-      <p:sp>
-        <p:nvSpPr>
-          <p:cNvPr id="6" name="TextBox 5"/>
+          <a:bodyPr rtlCol="0" anchor="ctr" wrap="square"/>
+          <a:lstStyle/>
+          <a:p>
+            <a:pPr algn="ctr">
+              <a:defRPr sz="950" b="1">
+                <a:solidFill>
+                  <a:srgbClr val="2563EB"/>
+                </a:solidFill>
+                <a:latin typeface="Segoe UI"/>
+              </a:defRPr>
+            </a:pPr>
+            <a:r>
+              <a:t>EVENT RADAR  •  SLIDE 03 OF 6  •  TEAM VP BOYS</a:t>
+            </a:r>
+          </a:p>
+        </p:txBody>
+      </p:sp>
+      <p:sp>
+        <p:nvSpPr>
+          <p:cNvPr id="3" name="TextBox 2"/>
           <p:cNvSpPr txBox="1"/>
           <p:nvPr/>
         </p:nvSpPr>
         <p:spPr>
           <a:xfrm>
-            <a:off x="914400" y="2103120"/>
-            <a:ext cx="2926080" cy="457200"/>
+            <a:off x="731520" y="731520"/>
+            <a:ext cx="10698480" cy="621792"/>
           </a:xfrm>
           <a:prstGeom prst="rect">
             <a:avLst/>
@@ -4704,29 +4647,29 @@
           <a:lstStyle/>
           <a:p>
             <a:pPr>
-              <a:defRPr sz="1500" b="1">
-                <a:solidFill>
-                  <a:srgbClr val="10B981"/>
-                </a:solidFill>
-                <a:latin typeface="Segoe UI"/>
-              </a:defRPr>
-            </a:pPr>
-            <a:r>
-              <a:t>Zero-Cost Operational Model</a:t>
-            </a:r>
-          </a:p>
-        </p:txBody>
-      </p:sp>
-      <p:sp>
-        <p:nvSpPr>
-          <p:cNvPr id="7" name="TextBox 6"/>
+              <a:defRPr sz="2600" b="1">
+                <a:solidFill>
+                  <a:srgbClr val="0F172A"/>
+                </a:solidFill>
+                <a:latin typeface="Segoe UI"/>
+              </a:defRPr>
+            </a:pPr>
+            <a:r>
+              <a:t>Technical Approach &amp; Architecture</a:t>
+            </a:r>
+          </a:p>
+        </p:txBody>
+      </p:sp>
+      <p:sp>
+        <p:nvSpPr>
+          <p:cNvPr id="4" name="TextBox 3"/>
           <p:cNvSpPr txBox="1"/>
           <p:nvPr/>
         </p:nvSpPr>
         <p:spPr>
           <a:xfrm>
-            <a:off x="914400" y="2560320"/>
-            <a:ext cx="2926080" cy="3520440"/>
+            <a:off x="731520" y="1353312"/>
+            <a:ext cx="10698480" cy="384048"/>
           </a:xfrm>
           <a:prstGeom prst="rect">
             <a:avLst/>
@@ -4740,90 +4683,39 @@
           <a:lstStyle/>
           <a:p>
             <a:pPr>
-              <a:spcAft>
-                <a:spcPts val="800"/>
-              </a:spcAft>
-              <a:defRPr sz="1150">
-                <a:solidFill>
-                  <a:srgbClr val="F8FAFC"/>
-                </a:solidFill>
-                <a:latin typeface="Segoe UI"/>
-              </a:defRPr>
-            </a:pPr>
-            <a:r>
-              <a:t>• 100% Free-Tier Architecture: Hosted on Supabase (PostgreSQL + PostGIS) &amp; Vercel Edge Serverless.</a:t>
-            </a:r>
-          </a:p>
-          <a:p>
-            <a:pPr>
-              <a:spcAft>
-                <a:spcPts val="800"/>
-              </a:spcAft>
-              <a:defRPr sz="1150">
-                <a:solidFill>
-                  <a:srgbClr val="F8FAFC"/>
-                </a:solidFill>
-                <a:latin typeface="Segoe UI"/>
-              </a:defRPr>
-            </a:pPr>
-            <a:r>
-              <a:t>• Zero Map API Burn: Using external Google Maps redirection instead of paid embedded tiles saves $200-$1000/month.</a:t>
-            </a:r>
-          </a:p>
-          <a:p>
-            <a:pPr>
-              <a:spcAft>
-                <a:spcPts val="800"/>
-              </a:spcAft>
-              <a:defRPr sz="1150">
-                <a:solidFill>
-                  <a:srgbClr val="F8FAFC"/>
-                </a:solidFill>
-                <a:latin typeface="Segoe UI"/>
-              </a:defRPr>
-            </a:pPr>
-            <a:r>
-              <a:t>• Lightweight client bundle with Turbopack, SSR caching, and zero heavy dependencies.</a:t>
-            </a:r>
-          </a:p>
-          <a:p>
-            <a:pPr>
-              <a:spcAft>
-                <a:spcPts val="800"/>
-              </a:spcAft>
-              <a:defRPr sz="1150">
-                <a:solidFill>
-                  <a:srgbClr val="F8FAFC"/>
-                </a:solidFill>
-                <a:latin typeface="Segoe UI"/>
-              </a:defRPr>
-            </a:pPr>
-            <a:r>
-              <a:t>• Instant deployment readiness with automated CI/CD on Vercel.</a:t>
-            </a:r>
-          </a:p>
-        </p:txBody>
-      </p:sp>
-      <p:sp>
-        <p:nvSpPr>
-          <p:cNvPr id="8" name="Rounded Rectangle 7"/>
+              <a:defRPr sz="1300">
+                <a:solidFill>
+                  <a:srgbClr val="64748B"/>
+                </a:solidFill>
+                <a:latin typeface="Segoe UI"/>
+              </a:defRPr>
+            </a:pPr>
+            <a:r>
+              <a:t>Production-grade Next.js 14 App Router paired with Supabase PostGIS spatial calculation engine.</a:t>
+            </a:r>
+          </a:p>
+        </p:txBody>
+      </p:sp>
+      <p:sp>
+        <p:nvSpPr>
+          <p:cNvPr id="5" name="Rounded Rectangle 4"/>
           <p:cNvSpPr/>
           <p:nvPr/>
         </p:nvSpPr>
         <p:spPr>
           <a:xfrm>
-            <a:off x="4389120" y="1920240"/>
-            <a:ext cx="3291840" cy="4297680"/>
+            <a:off x="731520" y="1920240"/>
+            <a:ext cx="2514600" cy="4297680"/>
           </a:xfrm>
           <a:prstGeom prst="roundRect">
             <a:avLst/>
           </a:prstGeom>
           <a:solidFill>
-            <a:srgbClr val="161C2D"/>
+            <a:srgbClr val="FFFFFF"/>
           </a:solidFill>
           <a:ln w="12700">
             <a:solidFill>
-              <a:srgbClr val="262E45"/>
+              <a:srgbClr val="E2E8F0"/>
             </a:solidFill>
           </a:ln>
         </p:spPr>
@@ -4851,148 +4743,23 @@
       </p:sp>
       <p:sp>
         <p:nvSpPr>
-          <p:cNvPr id="9" name="TextBox 8"/>
-          <p:cNvSpPr txBox="1"/>
-          <p:nvPr/>
-        </p:nvSpPr>
-        <p:spPr>
-          <a:xfrm>
-            <a:off x="4572000" y="2103120"/>
-            <a:ext cx="2926080" cy="457200"/>
-          </a:xfrm>
-          <a:prstGeom prst="rect">
-            <a:avLst/>
-          </a:prstGeom>
-          <a:noFill/>
-        </p:spPr>
-        <p:txBody>
-          <a:bodyPr wrap="square">
-            <a:spAutoFit/>
-          </a:bodyPr>
-          <a:lstStyle/>
-          <a:p>
-            <a:pPr>
-              <a:defRPr sz="1500" b="1">
-                <a:solidFill>
-                  <a:srgbClr val="3B82F6"/>
-                </a:solidFill>
-                <a:latin typeface="Segoe UI"/>
-              </a:defRPr>
-            </a:pPr>
-            <a:r>
-              <a:t>Technical Scalability</a:t>
-            </a:r>
-          </a:p>
-        </p:txBody>
-      </p:sp>
-      <p:sp>
-        <p:nvSpPr>
-          <p:cNvPr id="10" name="TextBox 9"/>
-          <p:cNvSpPr txBox="1"/>
-          <p:nvPr/>
-        </p:nvSpPr>
-        <p:spPr>
-          <a:xfrm>
-            <a:off x="4572000" y="2560320"/>
-            <a:ext cx="2926080" cy="3520440"/>
-          </a:xfrm>
-          <a:prstGeom prst="rect">
-            <a:avLst/>
-          </a:prstGeom>
-          <a:noFill/>
-        </p:spPr>
-        <p:txBody>
-          <a:bodyPr wrap="square">
-            <a:spAutoFit/>
-          </a:bodyPr>
-          <a:lstStyle/>
-          <a:p>
-            <a:pPr>
-              <a:spcAft>
-                <a:spcPts val="800"/>
-              </a:spcAft>
-              <a:defRPr sz="1150">
-                <a:solidFill>
-                  <a:srgbClr val="F8FAFC"/>
-                </a:solidFill>
-                <a:latin typeface="Segoe UI"/>
-              </a:defRPr>
-            </a:pPr>
-            <a:r>
-              <a:t>• PostGIS GiST indexing handles 500,000+ localized coordinate pins with O(log N) bounding box lookup.</a:t>
-            </a:r>
-          </a:p>
-          <a:p>
-            <a:pPr>
-              <a:spcAft>
-                <a:spcPts val="800"/>
-              </a:spcAft>
-              <a:defRPr sz="1150">
-                <a:solidFill>
-                  <a:srgbClr val="F8FAFC"/>
-                </a:solidFill>
-                <a:latin typeface="Segoe UI"/>
-              </a:defRPr>
-            </a:pPr>
-            <a:r>
-              <a:t>• Stateless Next.js edge handlers handle traffic spikes during major viral community events.</a:t>
-            </a:r>
-          </a:p>
-          <a:p>
-            <a:pPr>
-              <a:spcAft>
-                <a:spcPts val="800"/>
-              </a:spcAft>
-              <a:defRPr sz="1150">
-                <a:solidFill>
-                  <a:srgbClr val="F8FAFC"/>
-                </a:solidFill>
-                <a:latin typeface="Segoe UI"/>
-              </a:defRPr>
-            </a:pPr>
-            <a:r>
-              <a:t>• Connection pooling via Supabase Supavisor prevents database saturation.</a:t>
-            </a:r>
-          </a:p>
-          <a:p>
-            <a:pPr>
-              <a:spcAft>
-                <a:spcPts val="800"/>
-              </a:spcAft>
-              <a:defRPr sz="1150">
-                <a:solidFill>
-                  <a:srgbClr val="F8FAFC"/>
-                </a:solidFill>
-                <a:latin typeface="Segoe UI"/>
-              </a:defRPr>
-            </a:pPr>
-            <a:r>
-              <a:t>• Tested &amp; verified: 18/18 routes build cleanly, 0 lint warnings, sub-second TTFB.</a:t>
-            </a:r>
-          </a:p>
-        </p:txBody>
-      </p:sp>
-      <p:sp>
-        <p:nvSpPr>
-          <p:cNvPr id="11" name="Rounded Rectangle 10"/>
+          <p:cNvPr id="6" name="Rounded Rectangle 5"/>
           <p:cNvSpPr/>
           <p:nvPr/>
         </p:nvSpPr>
         <p:spPr>
           <a:xfrm>
-            <a:off x="8046720" y="1920240"/>
-            <a:ext cx="3383280" cy="4297680"/>
+            <a:off x="914400" y="2084832"/>
+            <a:ext cx="548640" cy="73152"/>
           </a:xfrm>
           <a:prstGeom prst="roundRect">
             <a:avLst/>
           </a:prstGeom>
           <a:solidFill>
-            <a:srgbClr val="161C2D"/>
+            <a:srgbClr val="2563EB"/>
           </a:solidFill>
-          <a:ln w="12700">
-            <a:solidFill>
-              <a:srgbClr val="262E45"/>
-            </a:solidFill>
+          <a:ln>
+            <a:noFill/>
           </a:ln>
         </p:spPr>
         <p:style>
@@ -5019,14 +4786,14 @@
       </p:sp>
       <p:sp>
         <p:nvSpPr>
-          <p:cNvPr id="12" name="TextBox 11"/>
+          <p:cNvPr id="7" name="TextBox 6"/>
           <p:cNvSpPr txBox="1"/>
           <p:nvPr/>
         </p:nvSpPr>
         <p:spPr>
           <a:xfrm>
-            <a:off x="8229600" y="2103120"/>
-            <a:ext cx="3017520" cy="457200"/>
+            <a:off x="914400" y="2212848"/>
+            <a:ext cx="2148840" cy="502920"/>
           </a:xfrm>
           <a:prstGeom prst="rect">
             <a:avLst/>
@@ -5042,27 +4809,27 @@
             <a:pPr>
               <a:defRPr sz="1500" b="1">
                 <a:solidFill>
-                  <a:srgbClr val="A855F7"/>
-                </a:solidFill>
-                <a:latin typeface="Segoe UI"/>
-              </a:defRPr>
-            </a:pPr>
-            <a:r>
-              <a:t>Multi-Stream Monetization</a:t>
-            </a:r>
-          </a:p>
-        </p:txBody>
-      </p:sp>
-      <p:sp>
-        <p:nvSpPr>
-          <p:cNvPr id="13" name="TextBox 12"/>
+                  <a:srgbClr val="0F172A"/>
+                </a:solidFill>
+                <a:latin typeface="Segoe UI"/>
+              </a:defRPr>
+            </a:pPr>
+            <a:r>
+              <a:t>Frontend &amp; HIG UX</a:t>
+            </a:r>
+          </a:p>
+        </p:txBody>
+      </p:sp>
+      <p:sp>
+        <p:nvSpPr>
+          <p:cNvPr id="8" name="TextBox 7"/>
           <p:cNvSpPr txBox="1"/>
           <p:nvPr/>
         </p:nvSpPr>
         <p:spPr>
           <a:xfrm>
-            <a:off x="8229600" y="2560320"/>
-            <a:ext cx="3017520" cy="3520440"/>
+            <a:off x="914400" y="2724912"/>
+            <a:ext cx="2148840" cy="3383280"/>
           </a:xfrm>
           <a:prstGeom prst="rect">
             <a:avLst/>
@@ -5077,49 +4844,698 @@
           <a:p>
             <a:pPr>
               <a:spcAft>
-                <a:spcPts val="800"/>
+                <a:spcPts val="700"/>
               </a:spcAft>
               <a:defRPr sz="1150">
                 <a:solidFill>
-                  <a:srgbClr val="F8FAFC"/>
-                </a:solidFill>
-                <a:latin typeface="Segoe UI"/>
-              </a:defRPr>
-            </a:pPr>
-            <a:r>
-              <a:t>• 1. 'Radar Boost' (Featured Pins): Promoted visibility for hackathons, conferences, and startup launches.</a:t>
+                  <a:srgbClr val="334155"/>
+                </a:solidFill>
+                <a:latin typeface="Segoe UI"/>
+              </a:defRPr>
+            </a:pPr>
+            <a:r>
+              <a:t>• Next.js 14 App Router + TypeScript + Tailwind CSS v4.</a:t>
             </a:r>
           </a:p>
           <a:p>
             <a:pPr>
               <a:spcAft>
-                <a:spcPts val="800"/>
+                <a:spcPts val="700"/>
               </a:spcAft>
               <a:defRPr sz="1150">
                 <a:solidFill>
-                  <a:srgbClr val="F8FAFC"/>
-                </a:solidFill>
-                <a:latin typeface="Segoe UI"/>
-              </a:defRPr>
-            </a:pPr>
-            <a:r>
-              <a:t>• 2. Ticketing Convenience Fee: Transparent 2-3% processing fee on paid workshops and concerts via UPI.</a:t>
+                  <a:srgbClr val="334155"/>
+                </a:solidFill>
+                <a:latin typeface="Segoe UI"/>
+              </a:defRPr>
+            </a:pPr>
+            <a:r>
+              <a:t>• Apple Human Interface Guidelines (HIG): Clean porcelain light theme, glassmorphic accents, spring physics.</a:t>
             </a:r>
           </a:p>
           <a:p>
             <a:pPr>
               <a:spcAft>
-                <a:spcPts val="800"/>
+                <a:spcPts val="700"/>
               </a:spcAft>
               <a:defRPr sz="1150">
                 <a:solidFill>
-                  <a:srgbClr val="F8FAFC"/>
-                </a:solidFill>
-                <a:latin typeface="Segoe UI"/>
-              </a:defRPr>
-            </a:pPr>
-            <a:r>
-              <a:t>• 3. Venue Sponsorships: Co-working spaces and cafe hubs sponsor neighborhood radars to drive footfall.</a:t>
+                  <a:srgbClr val="334155"/>
+                </a:solidFill>
+                <a:latin typeface="Segoe UI"/>
+              </a:defRPr>
+            </a:pPr>
+            <a:r>
+              <a:t>• WCAG AAA compliant contrast with optical hierarchy.</a:t>
+            </a:r>
+          </a:p>
+          <a:p>
+            <a:pPr>
+              <a:spcAft>
+                <a:spcPts val="700"/>
+              </a:spcAft>
+              <a:defRPr sz="1150">
+                <a:solidFill>
+                  <a:srgbClr val="334155"/>
+                </a:solidFill>
+                <a:latin typeface="Segoe UI"/>
+              </a:defRPr>
+            </a:pPr>
+            <a:r>
+              <a:t>• Client-side Haversine formula + Browser Geolocation for instant radius filtering.</a:t>
+            </a:r>
+          </a:p>
+        </p:txBody>
+      </p:sp>
+      <p:sp>
+        <p:nvSpPr>
+          <p:cNvPr id="9" name="Rounded Rectangle 8"/>
+          <p:cNvSpPr/>
+          <p:nvPr/>
+        </p:nvSpPr>
+        <p:spPr>
+          <a:xfrm>
+            <a:off x="3474720" y="1920240"/>
+            <a:ext cx="2514600" cy="4297680"/>
+          </a:xfrm>
+          <a:prstGeom prst="roundRect">
+            <a:avLst/>
+          </a:prstGeom>
+          <a:solidFill>
+            <a:srgbClr val="FFFFFF"/>
+          </a:solidFill>
+          <a:ln w="12700">
+            <a:solidFill>
+              <a:srgbClr val="E2E8F0"/>
+            </a:solidFill>
+          </a:ln>
+        </p:spPr>
+        <p:style>
+          <a:lnRef idx="1">
+            <a:schemeClr val="accent1"/>
+          </a:lnRef>
+          <a:fillRef idx="3">
+            <a:schemeClr val="accent1"/>
+          </a:fillRef>
+          <a:effectRef idx="2">
+            <a:schemeClr val="accent1"/>
+          </a:effectRef>
+          <a:fontRef idx="minor">
+            <a:schemeClr val="lt1"/>
+          </a:fontRef>
+        </p:style>
+        <p:txBody>
+          <a:bodyPr rtlCol="0" anchor="ctr"/>
+          <a:lstStyle/>
+          <a:p>
+            <a:pPr algn="ctr"/>
+          </a:p>
+        </p:txBody>
+      </p:sp>
+      <p:sp>
+        <p:nvSpPr>
+          <p:cNvPr id="10" name="Rounded Rectangle 9"/>
+          <p:cNvSpPr/>
+          <p:nvPr/>
+        </p:nvSpPr>
+        <p:spPr>
+          <a:xfrm>
+            <a:off x="3657600" y="2084832"/>
+            <a:ext cx="548640" cy="73152"/>
+          </a:xfrm>
+          <a:prstGeom prst="roundRect">
+            <a:avLst/>
+          </a:prstGeom>
+          <a:solidFill>
+            <a:srgbClr val="059669"/>
+          </a:solidFill>
+          <a:ln>
+            <a:noFill/>
+          </a:ln>
+        </p:spPr>
+        <p:style>
+          <a:lnRef idx="1">
+            <a:schemeClr val="accent1"/>
+          </a:lnRef>
+          <a:fillRef idx="3">
+            <a:schemeClr val="accent1"/>
+          </a:fillRef>
+          <a:effectRef idx="2">
+            <a:schemeClr val="accent1"/>
+          </a:effectRef>
+          <a:fontRef idx="minor">
+            <a:schemeClr val="lt1"/>
+          </a:fontRef>
+        </p:style>
+        <p:txBody>
+          <a:bodyPr rtlCol="0" anchor="ctr"/>
+          <a:lstStyle/>
+          <a:p>
+            <a:pPr algn="ctr"/>
+          </a:p>
+        </p:txBody>
+      </p:sp>
+      <p:sp>
+        <p:nvSpPr>
+          <p:cNvPr id="11" name="TextBox 10"/>
+          <p:cNvSpPr txBox="1"/>
+          <p:nvPr/>
+        </p:nvSpPr>
+        <p:spPr>
+          <a:xfrm>
+            <a:off x="3657600" y="2212848"/>
+            <a:ext cx="2148840" cy="502920"/>
+          </a:xfrm>
+          <a:prstGeom prst="rect">
+            <a:avLst/>
+          </a:prstGeom>
+          <a:noFill/>
+        </p:spPr>
+        <p:txBody>
+          <a:bodyPr wrap="square">
+            <a:spAutoFit/>
+          </a:bodyPr>
+          <a:lstStyle/>
+          <a:p>
+            <a:pPr>
+              <a:defRPr sz="1500" b="1">
+                <a:solidFill>
+                  <a:srgbClr val="0F172A"/>
+                </a:solidFill>
+                <a:latin typeface="Segoe UI"/>
+              </a:defRPr>
+            </a:pPr>
+            <a:r>
+              <a:t>PostGIS Spatial DB</a:t>
+            </a:r>
+          </a:p>
+        </p:txBody>
+      </p:sp>
+      <p:sp>
+        <p:nvSpPr>
+          <p:cNvPr id="12" name="TextBox 11"/>
+          <p:cNvSpPr txBox="1"/>
+          <p:nvPr/>
+        </p:nvSpPr>
+        <p:spPr>
+          <a:xfrm>
+            <a:off x="3657600" y="2724912"/>
+            <a:ext cx="2148840" cy="3383280"/>
+          </a:xfrm>
+          <a:prstGeom prst="rect">
+            <a:avLst/>
+          </a:prstGeom>
+          <a:noFill/>
+        </p:spPr>
+        <p:txBody>
+          <a:bodyPr wrap="square">
+            <a:spAutoFit/>
+          </a:bodyPr>
+          <a:lstStyle/>
+          <a:p>
+            <a:pPr>
+              <a:spcAft>
+                <a:spcPts val="700"/>
+              </a:spcAft>
+              <a:defRPr sz="1150">
+                <a:solidFill>
+                  <a:srgbClr val="334155"/>
+                </a:solidFill>
+                <a:latin typeface="Segoe UI"/>
+              </a:defRPr>
+            </a:pPr>
+            <a:r>
+              <a:t>• Supabase PostgreSQL equipped with the PostGIS spatial engine.</a:t>
+            </a:r>
+          </a:p>
+          <a:p>
+            <a:pPr>
+              <a:spcAft>
+                <a:spcPts val="700"/>
+              </a:spcAft>
+              <a:defRPr sz="1150">
+                <a:solidFill>
+                  <a:srgbClr val="334155"/>
+                </a:solidFill>
+                <a:latin typeface="Segoe UI"/>
+              </a:defRPr>
+            </a:pPr>
+            <a:r>
+              <a:t>• RPC function 'get_nearby_events' utilizing ST_DWithin &amp; ST_Distance spherical math.</a:t>
+            </a:r>
+          </a:p>
+          <a:p>
+            <a:pPr>
+              <a:spcAft>
+                <a:spcPts val="700"/>
+              </a:spcAft>
+              <a:defRPr sz="1150">
+                <a:solidFill>
+                  <a:srgbClr val="334155"/>
+                </a:solidFill>
+                <a:latin typeface="Segoe UI"/>
+              </a:defRPr>
+            </a:pPr>
+            <a:r>
+              <a:t>• GiST spatial indexes on geography(Point, 4326) for sub-50ms query latency at scale.</a:t>
+            </a:r>
+          </a:p>
+          <a:p>
+            <a:pPr>
+              <a:spcAft>
+                <a:spcPts val="700"/>
+              </a:spcAft>
+              <a:defRPr sz="1150">
+                <a:solidFill>
+                  <a:srgbClr val="334155"/>
+                </a:solidFill>
+                <a:latin typeface="Segoe UI"/>
+              </a:defRPr>
+            </a:pPr>
+            <a:r>
+              <a:t>• Native city coordinate centroids for 5 major Indian metros.</a:t>
+            </a:r>
+          </a:p>
+        </p:txBody>
+      </p:sp>
+      <p:sp>
+        <p:nvSpPr>
+          <p:cNvPr id="13" name="Rounded Rectangle 12"/>
+          <p:cNvSpPr/>
+          <p:nvPr/>
+        </p:nvSpPr>
+        <p:spPr>
+          <a:xfrm>
+            <a:off x="6217920" y="1920240"/>
+            <a:ext cx="2514600" cy="4297680"/>
+          </a:xfrm>
+          <a:prstGeom prst="roundRect">
+            <a:avLst/>
+          </a:prstGeom>
+          <a:solidFill>
+            <a:srgbClr val="FFFFFF"/>
+          </a:solidFill>
+          <a:ln w="12700">
+            <a:solidFill>
+              <a:srgbClr val="E2E8F0"/>
+            </a:solidFill>
+          </a:ln>
+        </p:spPr>
+        <p:style>
+          <a:lnRef idx="1">
+            <a:schemeClr val="accent1"/>
+          </a:lnRef>
+          <a:fillRef idx="3">
+            <a:schemeClr val="accent1"/>
+          </a:fillRef>
+          <a:effectRef idx="2">
+            <a:schemeClr val="accent1"/>
+          </a:effectRef>
+          <a:fontRef idx="minor">
+            <a:schemeClr val="lt1"/>
+          </a:fontRef>
+        </p:style>
+        <p:txBody>
+          <a:bodyPr rtlCol="0" anchor="ctr"/>
+          <a:lstStyle/>
+          <a:p>
+            <a:pPr algn="ctr"/>
+          </a:p>
+        </p:txBody>
+      </p:sp>
+      <p:sp>
+        <p:nvSpPr>
+          <p:cNvPr id="14" name="Rounded Rectangle 13"/>
+          <p:cNvSpPr/>
+          <p:nvPr/>
+        </p:nvSpPr>
+        <p:spPr>
+          <a:xfrm>
+            <a:off x="6400800" y="2084832"/>
+            <a:ext cx="548640" cy="73152"/>
+          </a:xfrm>
+          <a:prstGeom prst="roundRect">
+            <a:avLst/>
+          </a:prstGeom>
+          <a:solidFill>
+            <a:srgbClr val="0284C7"/>
+          </a:solidFill>
+          <a:ln>
+            <a:noFill/>
+          </a:ln>
+        </p:spPr>
+        <p:style>
+          <a:lnRef idx="1">
+            <a:schemeClr val="accent1"/>
+          </a:lnRef>
+          <a:fillRef idx="3">
+            <a:schemeClr val="accent1"/>
+          </a:fillRef>
+          <a:effectRef idx="2">
+            <a:schemeClr val="accent1"/>
+          </a:effectRef>
+          <a:fontRef idx="minor">
+            <a:schemeClr val="lt1"/>
+          </a:fontRef>
+        </p:style>
+        <p:txBody>
+          <a:bodyPr rtlCol="0" anchor="ctr"/>
+          <a:lstStyle/>
+          <a:p>
+            <a:pPr algn="ctr"/>
+          </a:p>
+        </p:txBody>
+      </p:sp>
+      <p:sp>
+        <p:nvSpPr>
+          <p:cNvPr id="15" name="TextBox 14"/>
+          <p:cNvSpPr txBox="1"/>
+          <p:nvPr/>
+        </p:nvSpPr>
+        <p:spPr>
+          <a:xfrm>
+            <a:off x="6400800" y="2212848"/>
+            <a:ext cx="2148840" cy="502920"/>
+          </a:xfrm>
+          <a:prstGeom prst="rect">
+            <a:avLst/>
+          </a:prstGeom>
+          <a:noFill/>
+        </p:spPr>
+        <p:txBody>
+          <a:bodyPr wrap="square">
+            <a:spAutoFit/>
+          </a:bodyPr>
+          <a:lstStyle/>
+          <a:p>
+            <a:pPr>
+              <a:defRPr sz="1500" b="1">
+                <a:solidFill>
+                  <a:srgbClr val="0F172A"/>
+                </a:solidFill>
+                <a:latin typeface="Segoe UI"/>
+              </a:defRPr>
+            </a:pPr>
+            <a:r>
+              <a:t>Maps Link Parser</a:t>
+            </a:r>
+          </a:p>
+        </p:txBody>
+      </p:sp>
+      <p:sp>
+        <p:nvSpPr>
+          <p:cNvPr id="16" name="TextBox 15"/>
+          <p:cNvSpPr txBox="1"/>
+          <p:nvPr/>
+        </p:nvSpPr>
+        <p:spPr>
+          <a:xfrm>
+            <a:off x="6400800" y="2724912"/>
+            <a:ext cx="2148840" cy="3383280"/>
+          </a:xfrm>
+          <a:prstGeom prst="rect">
+            <a:avLst/>
+          </a:prstGeom>
+          <a:noFill/>
+        </p:spPr>
+        <p:txBody>
+          <a:bodyPr wrap="square">
+            <a:spAutoFit/>
+          </a:bodyPr>
+          <a:lstStyle/>
+          <a:p>
+            <a:pPr>
+              <a:spcAft>
+                <a:spcPts val="700"/>
+              </a:spcAft>
+              <a:defRPr sz="1150">
+                <a:solidFill>
+                  <a:srgbClr val="334155"/>
+                </a:solidFill>
+                <a:latin typeface="Segoe UI"/>
+              </a:defRPr>
+            </a:pPr>
+            <a:r>
+              <a:t>• Proprietary regex parser in lib/maps.ts.</a:t>
+            </a:r>
+          </a:p>
+          <a:p>
+            <a:pPr>
+              <a:spcAft>
+                <a:spcPts val="700"/>
+              </a:spcAft>
+              <a:defRPr sz="1150">
+                <a:solidFill>
+                  <a:srgbClr val="334155"/>
+                </a:solidFill>
+                <a:latin typeface="Segoe UI"/>
+              </a:defRPr>
+            </a:pPr>
+            <a:r>
+              <a:t>• Organizers paste ANY Google Maps link (place, venue pin, directions, or coordinates).</a:t>
+            </a:r>
+          </a:p>
+          <a:p>
+            <a:pPr>
+              <a:spcAft>
+                <a:spcPts val="700"/>
+              </a:spcAft>
+              <a:defRPr sz="1150">
+                <a:solidFill>
+                  <a:srgbClr val="334155"/>
+                </a:solidFill>
+                <a:latin typeface="Segoe UI"/>
+              </a:defRPr>
+            </a:pPr>
+            <a:r>
+              <a:t>• Extracts lat/lng without paid Geocoding APIs, saving 100% of mapping API costs.</a:t>
+            </a:r>
+          </a:p>
+          <a:p>
+            <a:pPr>
+              <a:spcAft>
+                <a:spcPts val="700"/>
+              </a:spcAft>
+              <a:defRPr sz="1150">
+                <a:solidFill>
+                  <a:srgbClr val="334155"/>
+                </a:solidFill>
+                <a:latin typeface="Segoe UI"/>
+              </a:defRPr>
+            </a:pPr>
+            <a:r>
+              <a:t>• Generates direct turn-by-turn navigation URLs (maps.google.com?q=lat,lng).</a:t>
+            </a:r>
+          </a:p>
+        </p:txBody>
+      </p:sp>
+      <p:sp>
+        <p:nvSpPr>
+          <p:cNvPr id="17" name="Rounded Rectangle 16"/>
+          <p:cNvSpPr/>
+          <p:nvPr/>
+        </p:nvSpPr>
+        <p:spPr>
+          <a:xfrm>
+            <a:off x="8961120" y="1920240"/>
+            <a:ext cx="2514600" cy="4297680"/>
+          </a:xfrm>
+          <a:prstGeom prst="roundRect">
+            <a:avLst/>
+          </a:prstGeom>
+          <a:solidFill>
+            <a:srgbClr val="FFFFFF"/>
+          </a:solidFill>
+          <a:ln w="12700">
+            <a:solidFill>
+              <a:srgbClr val="E2E8F0"/>
+            </a:solidFill>
+          </a:ln>
+        </p:spPr>
+        <p:style>
+          <a:lnRef idx="1">
+            <a:schemeClr val="accent1"/>
+          </a:lnRef>
+          <a:fillRef idx="3">
+            <a:schemeClr val="accent1"/>
+          </a:fillRef>
+          <a:effectRef idx="2">
+            <a:schemeClr val="accent1"/>
+          </a:effectRef>
+          <a:fontRef idx="minor">
+            <a:schemeClr val="lt1"/>
+          </a:fontRef>
+        </p:style>
+        <p:txBody>
+          <a:bodyPr rtlCol="0" anchor="ctr"/>
+          <a:lstStyle/>
+          <a:p>
+            <a:pPr algn="ctr"/>
+          </a:p>
+        </p:txBody>
+      </p:sp>
+      <p:sp>
+        <p:nvSpPr>
+          <p:cNvPr id="18" name="Rounded Rectangle 17"/>
+          <p:cNvSpPr/>
+          <p:nvPr/>
+        </p:nvSpPr>
+        <p:spPr>
+          <a:xfrm>
+            <a:off x="9144000" y="2084832"/>
+            <a:ext cx="548640" cy="73152"/>
+          </a:xfrm>
+          <a:prstGeom prst="roundRect">
+            <a:avLst/>
+          </a:prstGeom>
+          <a:solidFill>
+            <a:srgbClr val="7C3AED"/>
+          </a:solidFill>
+          <a:ln>
+            <a:noFill/>
+          </a:ln>
+        </p:spPr>
+        <p:style>
+          <a:lnRef idx="1">
+            <a:schemeClr val="accent1"/>
+          </a:lnRef>
+          <a:fillRef idx="3">
+            <a:schemeClr val="accent1"/>
+          </a:fillRef>
+          <a:effectRef idx="2">
+            <a:schemeClr val="accent1"/>
+          </a:effectRef>
+          <a:fontRef idx="minor">
+            <a:schemeClr val="lt1"/>
+          </a:fontRef>
+        </p:style>
+        <p:txBody>
+          <a:bodyPr rtlCol="0" anchor="ctr"/>
+          <a:lstStyle/>
+          <a:p>
+            <a:pPr algn="ctr"/>
+          </a:p>
+        </p:txBody>
+      </p:sp>
+      <p:sp>
+        <p:nvSpPr>
+          <p:cNvPr id="19" name="TextBox 18"/>
+          <p:cNvSpPr txBox="1"/>
+          <p:nvPr/>
+        </p:nvSpPr>
+        <p:spPr>
+          <a:xfrm>
+            <a:off x="9144000" y="2212848"/>
+            <a:ext cx="2148840" cy="502920"/>
+          </a:xfrm>
+          <a:prstGeom prst="rect">
+            <a:avLst/>
+          </a:prstGeom>
+          <a:noFill/>
+        </p:spPr>
+        <p:txBody>
+          <a:bodyPr wrap="square">
+            <a:spAutoFit/>
+          </a:bodyPr>
+          <a:lstStyle/>
+          <a:p>
+            <a:pPr>
+              <a:defRPr sz="1500" b="1">
+                <a:solidFill>
+                  <a:srgbClr val="0F172A"/>
+                </a:solidFill>
+                <a:latin typeface="Segoe UI"/>
+              </a:defRPr>
+            </a:pPr>
+            <a:r>
+              <a:t>Auth &amp; Real Payments</a:t>
+            </a:r>
+          </a:p>
+        </p:txBody>
+      </p:sp>
+      <p:sp>
+        <p:nvSpPr>
+          <p:cNvPr id="20" name="TextBox 19"/>
+          <p:cNvSpPr txBox="1"/>
+          <p:nvPr/>
+        </p:nvSpPr>
+        <p:spPr>
+          <a:xfrm>
+            <a:off x="9144000" y="2724912"/>
+            <a:ext cx="2148840" cy="3383280"/>
+          </a:xfrm>
+          <a:prstGeom prst="rect">
+            <a:avLst/>
+          </a:prstGeom>
+          <a:noFill/>
+        </p:spPr>
+        <p:txBody>
+          <a:bodyPr wrap="square">
+            <a:spAutoFit/>
+          </a:bodyPr>
+          <a:lstStyle/>
+          <a:p>
+            <a:pPr>
+              <a:spcAft>
+                <a:spcPts val="700"/>
+              </a:spcAft>
+              <a:defRPr sz="1150">
+                <a:solidFill>
+                  <a:srgbClr val="334155"/>
+                </a:solidFill>
+                <a:latin typeface="Segoe UI"/>
+              </a:defRPr>
+            </a:pPr>
+            <a:r>
+              <a:t>• Supabase Auth with Email OTP, Password, and OAuth.</a:t>
+            </a:r>
+          </a:p>
+          <a:p>
+            <a:pPr>
+              <a:spcAft>
+                <a:spcPts val="700"/>
+              </a:spcAft>
+              <a:defRPr sz="1150">
+                <a:solidFill>
+                  <a:srgbClr val="334155"/>
+                </a:solidFill>
+                <a:latin typeface="Segoe UI"/>
+              </a:defRPr>
+            </a:pPr>
+            <a:r>
+              <a:t>• Row-Level Security (RLS) protecting RSVPs, events, and community walls.</a:t>
+            </a:r>
+          </a:p>
+          <a:p>
+            <a:pPr>
+              <a:spcAft>
+                <a:spcPts val="700"/>
+              </a:spcAft>
+              <a:defRPr sz="1150">
+                <a:solidFill>
+                  <a:srgbClr val="334155"/>
+                </a:solidFill>
+                <a:latin typeface="Segoe UI"/>
+              </a:defRPr>
+            </a:pPr>
+            <a:r>
+              <a:t>• Integrated Apple-styled checkout supporting UPI, Cards, and Netbanking.</a:t>
+            </a:r>
+          </a:p>
+          <a:p>
+            <a:pPr>
+              <a:spcAft>
+                <a:spcPts val="700"/>
+              </a:spcAft>
+              <a:defRPr sz="1150">
+                <a:solidFill>
+                  <a:srgbClr val="334155"/>
+                </a:solidFill>
+                <a:latin typeface="Segoe UI"/>
+              </a:defRPr>
+            </a:pPr>
+            <a:r>
+              <a:t>• Real-time QR Digital Ticket generation and iCal / Google Calendar export.</a:t>
             </a:r>
           </a:p>
         </p:txBody>
@@ -5138,7 +5554,7 @@
     <p:bg>
       <p:bgPr>
         <a:solidFill>
-          <a:srgbClr val="0B0F19"/>
+          <a:srgbClr val="F8FAFC"/>
         </a:solidFill>
         <a:effectLst/>
       </p:bgPr>
@@ -5152,132 +5568,24 @@
       <p:grpSpPr/>
       <p:sp>
         <p:nvSpPr>
-          <p:cNvPr id="2" name="TextBox 1"/>
-          <p:cNvSpPr txBox="1"/>
-          <p:nvPr/>
-        </p:nvSpPr>
-        <p:spPr>
-          <a:xfrm>
-            <a:off x="731520" y="411480"/>
-            <a:ext cx="7315200" cy="320040"/>
-          </a:xfrm>
-          <a:prstGeom prst="rect">
-            <a:avLst/>
-          </a:prstGeom>
-          <a:noFill/>
-        </p:spPr>
-        <p:txBody>
-          <a:bodyPr wrap="square">
-            <a:spAutoFit/>
-          </a:bodyPr>
-          <a:lstStyle/>
-          <a:p>
-            <a:pPr>
-              <a:defRPr sz="1000" b="1">
-                <a:solidFill>
-                  <a:srgbClr val="06B6D4"/>
-                </a:solidFill>
-                <a:latin typeface="Segoe UI"/>
-              </a:defRPr>
-            </a:pPr>
-            <a:r>
-              <a:t>EVENT RADAR  •  SLIDE 04 OF 5  •  VECNAVERSE HACKATHON</a:t>
-            </a:r>
-          </a:p>
-        </p:txBody>
-      </p:sp>
-      <p:sp>
-        <p:nvSpPr>
-          <p:cNvPr id="3" name="TextBox 2"/>
-          <p:cNvSpPr txBox="1"/>
-          <p:nvPr/>
-        </p:nvSpPr>
-        <p:spPr>
-          <a:xfrm>
-            <a:off x="731520" y="685800"/>
-            <a:ext cx="10515600" cy="685800"/>
-          </a:xfrm>
-          <a:prstGeom prst="rect">
-            <a:avLst/>
-          </a:prstGeom>
-          <a:noFill/>
-        </p:spPr>
-        <p:txBody>
-          <a:bodyPr wrap="square">
-            <a:spAutoFit/>
-          </a:bodyPr>
-          <a:lstStyle/>
-          <a:p>
-            <a:pPr>
-              <a:defRPr sz="2600" b="1">
-                <a:solidFill>
-                  <a:srgbClr val="F8FAFC"/>
-                </a:solidFill>
-                <a:latin typeface="Segoe UI"/>
-              </a:defRPr>
-            </a:pPr>
-            <a:r>
-              <a:t>Impact &amp; Benefit</a:t>
-            </a:r>
-          </a:p>
-        </p:txBody>
-      </p:sp>
-      <p:sp>
-        <p:nvSpPr>
-          <p:cNvPr id="4" name="TextBox 3"/>
-          <p:cNvSpPr txBox="1"/>
-          <p:nvPr/>
-        </p:nvSpPr>
-        <p:spPr>
-          <a:xfrm>
-            <a:off x="731520" y="1371600"/>
-            <a:ext cx="10515600" cy="411480"/>
-          </a:xfrm>
-          <a:prstGeom prst="rect">
-            <a:avLst/>
-          </a:prstGeom>
-          <a:noFill/>
-        </p:spPr>
-        <p:txBody>
-          <a:bodyPr wrap="square">
-            <a:spAutoFit/>
-          </a:bodyPr>
-          <a:lstStyle/>
-          <a:p>
-            <a:pPr>
-              <a:defRPr sz="1300">
-                <a:solidFill>
-                  <a:srgbClr val="94A3B8"/>
-                </a:solidFill>
-                <a:latin typeface="Segoe UI"/>
-              </a:defRPr>
-            </a:pPr>
-            <a:r>
-              <a:t>Transforming urban socialization and hyper-charging India's grassroots tech ecosystem.</a:t>
-            </a:r>
-          </a:p>
-        </p:txBody>
-      </p:sp>
-      <p:sp>
-        <p:nvSpPr>
-          <p:cNvPr id="5" name="Rounded Rectangle 4"/>
+          <p:cNvPr id="2" name="Rounded Rectangle 1"/>
           <p:cNvSpPr/>
           <p:nvPr/>
         </p:nvSpPr>
         <p:spPr>
           <a:xfrm>
-            <a:off x="731520" y="1920240"/>
-            <a:ext cx="3291840" cy="4297680"/>
+            <a:off x="731520" y="384048"/>
+            <a:ext cx="3931920" cy="292608"/>
           </a:xfrm>
           <a:prstGeom prst="roundRect">
             <a:avLst/>
           </a:prstGeom>
           <a:solidFill>
-            <a:srgbClr val="161C2D"/>
+            <a:srgbClr val="EEF2FF"/>
           </a:solidFill>
           <a:ln w="12700">
             <a:solidFill>
-              <a:srgbClr val="262E45"/>
+              <a:srgbClr val="C7D2FE"/>
             </a:solidFill>
           </a:ln>
         </p:spPr>
@@ -5296,23 +5604,33 @@
           </a:fontRef>
         </p:style>
         <p:txBody>
-          <a:bodyPr rtlCol="0" anchor="ctr"/>
-          <a:lstStyle/>
-          <a:p>
-            <a:pPr algn="ctr"/>
-          </a:p>
-        </p:txBody>
-      </p:sp>
-      <p:sp>
-        <p:nvSpPr>
-          <p:cNvPr id="6" name="TextBox 5"/>
+          <a:bodyPr rtlCol="0" anchor="ctr" wrap="square"/>
+          <a:lstStyle/>
+          <a:p>
+            <a:pPr algn="ctr">
+              <a:defRPr sz="950" b="1">
+                <a:solidFill>
+                  <a:srgbClr val="2563EB"/>
+                </a:solidFill>
+                <a:latin typeface="Segoe UI"/>
+              </a:defRPr>
+            </a:pPr>
+            <a:r>
+              <a:t>EVENT RADAR  •  SLIDE 04 OF 6  •  TEAM VP BOYS</a:t>
+            </a:r>
+          </a:p>
+        </p:txBody>
+      </p:sp>
+      <p:sp>
+        <p:nvSpPr>
+          <p:cNvPr id="3" name="TextBox 2"/>
           <p:cNvSpPr txBox="1"/>
           <p:nvPr/>
         </p:nvSpPr>
         <p:spPr>
           <a:xfrm>
-            <a:off x="914400" y="2103120"/>
-            <a:ext cx="2926080" cy="457200"/>
+            <a:off x="731520" y="731520"/>
+            <a:ext cx="10698480" cy="621792"/>
           </a:xfrm>
           <a:prstGeom prst="rect">
             <a:avLst/>
@@ -5326,29 +5644,29 @@
           <a:lstStyle/>
           <a:p>
             <a:pPr>
-              <a:defRPr sz="1500" b="1">
-                <a:solidFill>
-                  <a:srgbClr val="06B6D4"/>
-                </a:solidFill>
-                <a:latin typeface="Segoe UI"/>
-              </a:defRPr>
-            </a:pPr>
-            <a:r>
-              <a:t>For Attendees &amp; Builders</a:t>
-            </a:r>
-          </a:p>
-        </p:txBody>
-      </p:sp>
-      <p:sp>
-        <p:nvSpPr>
-          <p:cNvPr id="7" name="TextBox 6"/>
+              <a:defRPr sz="2600" b="1">
+                <a:solidFill>
+                  <a:srgbClr val="0F172A"/>
+                </a:solidFill>
+                <a:latin typeface="Segoe UI"/>
+              </a:defRPr>
+            </a:pPr>
+            <a:r>
+              <a:t>Feasibility &amp; Commercial Viability</a:t>
+            </a:r>
+          </a:p>
+        </p:txBody>
+      </p:sp>
+      <p:sp>
+        <p:nvSpPr>
+          <p:cNvPr id="4" name="TextBox 3"/>
           <p:cNvSpPr txBox="1"/>
           <p:nvPr/>
         </p:nvSpPr>
         <p:spPr>
           <a:xfrm>
-            <a:off x="914400" y="2560320"/>
-            <a:ext cx="2926080" cy="3520440"/>
+            <a:off x="731520" y="1353312"/>
+            <a:ext cx="10698480" cy="384048"/>
           </a:xfrm>
           <a:prstGeom prst="rect">
             <a:avLst/>
@@ -5362,90 +5680,39 @@
           <a:lstStyle/>
           <a:p>
             <a:pPr>
-              <a:spcAft>
-                <a:spcPts val="800"/>
-              </a:spcAft>
-              <a:defRPr sz="1150">
-                <a:solidFill>
-                  <a:srgbClr val="F8FAFC"/>
-                </a:solidFill>
-                <a:latin typeface="Segoe UI"/>
-              </a:defRPr>
-            </a:pPr>
-            <a:r>
-              <a:t>• Eliminates Urban FOMO: Instantly see what meetups, jams, or hackathons are happening within 5km.</a:t>
-            </a:r>
-          </a:p>
-          <a:p>
-            <a:pPr>
-              <a:spcAft>
-                <a:spcPts val="800"/>
-              </a:spcAft>
-              <a:defRPr sz="1150">
-                <a:solidFill>
-                  <a:srgbClr val="F8FAFC"/>
-                </a:solidFill>
-                <a:latin typeface="Segoe UI"/>
-              </a:defRPr>
-            </a:pPr>
-            <a:r>
-              <a:t>• Saved Commute Time: Stops users from traveling across congested metros for low-relevance events.</a:t>
-            </a:r>
-          </a:p>
-          <a:p>
-            <a:pPr>
-              <a:spcAft>
-                <a:spcPts val="800"/>
-              </a:spcAft>
-              <a:defRPr sz="1150">
-                <a:solidFill>
-                  <a:srgbClr val="F8FAFC"/>
-                </a:solidFill>
-                <a:latin typeface="Segoe UI"/>
-              </a:defRPr>
-            </a:pPr>
-            <a:r>
-              <a:t>• Frictionless Attendance: 1-click RSVP with real-time attendee tracking and automatic Google/iCal calendar sync.</a:t>
-            </a:r>
-          </a:p>
-          <a:p>
-            <a:pPr>
-              <a:spcAft>
-                <a:spcPts val="800"/>
-              </a:spcAft>
-              <a:defRPr sz="1150">
-                <a:solidFill>
-                  <a:srgbClr val="F8FAFC"/>
-                </a:solidFill>
-                <a:latin typeface="Segoe UI"/>
-              </a:defRPr>
-            </a:pPr>
-            <a:r>
-              <a:t>• Community Discussion Wall: Ask organizers questions directly on the event page before arriving.</a:t>
-            </a:r>
-          </a:p>
-        </p:txBody>
-      </p:sp>
-      <p:sp>
-        <p:nvSpPr>
-          <p:cNvPr id="8" name="Rounded Rectangle 7"/>
+              <a:defRPr sz="1300">
+                <a:solidFill>
+                  <a:srgbClr val="64748B"/>
+                </a:solidFill>
+                <a:latin typeface="Segoe UI"/>
+              </a:defRPr>
+            </a:pPr>
+            <a:r>
+              <a:t>Zero-cost operational overhead combined with sustainable, community-first monetization.</a:t>
+            </a:r>
+          </a:p>
+        </p:txBody>
+      </p:sp>
+      <p:sp>
+        <p:nvSpPr>
+          <p:cNvPr id="5" name="Rounded Rectangle 4"/>
           <p:cNvSpPr/>
           <p:nvPr/>
         </p:nvSpPr>
         <p:spPr>
           <a:xfrm>
-            <a:off x="4389120" y="1920240"/>
+            <a:off x="731520" y="1920240"/>
             <a:ext cx="3291840" cy="4297680"/>
           </a:xfrm>
           <a:prstGeom prst="roundRect">
             <a:avLst/>
           </a:prstGeom>
           <a:solidFill>
-            <a:srgbClr val="161C2D"/>
+            <a:srgbClr val="FFFFFF"/>
           </a:solidFill>
           <a:ln w="12700">
             <a:solidFill>
-              <a:srgbClr val="262E45"/>
+              <a:srgbClr val="E2E8F0"/>
             </a:solidFill>
           </a:ln>
         </p:spPr>
@@ -5473,148 +5740,23 @@
       </p:sp>
       <p:sp>
         <p:nvSpPr>
-          <p:cNvPr id="9" name="TextBox 8"/>
-          <p:cNvSpPr txBox="1"/>
-          <p:nvPr/>
-        </p:nvSpPr>
-        <p:spPr>
-          <a:xfrm>
-            <a:off x="4572000" y="2103120"/>
-            <a:ext cx="2926080" cy="457200"/>
-          </a:xfrm>
-          <a:prstGeom prst="rect">
-            <a:avLst/>
-          </a:prstGeom>
-          <a:noFill/>
-        </p:spPr>
-        <p:txBody>
-          <a:bodyPr wrap="square">
-            <a:spAutoFit/>
-          </a:bodyPr>
-          <a:lstStyle/>
-          <a:p>
-            <a:pPr>
-              <a:defRPr sz="1500" b="1">
-                <a:solidFill>
-                  <a:srgbClr val="10B981"/>
-                </a:solidFill>
-                <a:latin typeface="Segoe UI"/>
-              </a:defRPr>
-            </a:pPr>
-            <a:r>
-              <a:t>For Grassroots Organizers</a:t>
-            </a:r>
-          </a:p>
-        </p:txBody>
-      </p:sp>
-      <p:sp>
-        <p:nvSpPr>
-          <p:cNvPr id="10" name="TextBox 9"/>
-          <p:cNvSpPr txBox="1"/>
-          <p:nvPr/>
-        </p:nvSpPr>
-        <p:spPr>
-          <a:xfrm>
-            <a:off x="4572000" y="2560320"/>
-            <a:ext cx="2926080" cy="3520440"/>
-          </a:xfrm>
-          <a:prstGeom prst="rect">
-            <a:avLst/>
-          </a:prstGeom>
-          <a:noFill/>
-        </p:spPr>
-        <p:txBody>
-          <a:bodyPr wrap="square">
-            <a:spAutoFit/>
-          </a:bodyPr>
-          <a:lstStyle/>
-          <a:p>
-            <a:pPr>
-              <a:spcAft>
-                <a:spcPts val="800"/>
-              </a:spcAft>
-              <a:defRPr sz="1150">
-                <a:solidFill>
-                  <a:srgbClr val="F8FAFC"/>
-                </a:solidFill>
-                <a:latin typeface="Segoe UI"/>
-              </a:defRPr>
-            </a:pPr>
-            <a:r>
-              <a:t>• Sub-60s Event Setup: Paste a Google Maps link and title; no coordinate lookups or forms.</a:t>
-            </a:r>
-          </a:p>
-          <a:p>
-            <a:pPr>
-              <a:spcAft>
-                <a:spcPts val="800"/>
-              </a:spcAft>
-              <a:defRPr sz="1150">
-                <a:solidFill>
-                  <a:srgbClr val="F8FAFC"/>
-                </a:solidFill>
-                <a:latin typeface="Segoe UI"/>
-              </a:defRPr>
-            </a:pPr>
-            <a:r>
-              <a:t>• 100% Free Hosting: No monthly SaaS subscription like Meetup.com ($35/mo).</a:t>
-            </a:r>
-          </a:p>
-          <a:p>
-            <a:pPr>
-              <a:spcAft>
-                <a:spcPts val="800"/>
-              </a:spcAft>
-              <a:defRPr sz="1150">
-                <a:solidFill>
-                  <a:srgbClr val="F8FAFC"/>
-                </a:solidFill>
-                <a:latin typeface="Segoe UI"/>
-              </a:defRPr>
-            </a:pPr>
-            <a:r>
-              <a:t>• Dedicated Organizer Hub: Real-time attendee roster, RSVP count, event edit/cancel controls at /profile/my-events.</a:t>
-            </a:r>
-          </a:p>
-          <a:p>
-            <a:pPr>
-              <a:spcAft>
-                <a:spcPts val="800"/>
-              </a:spcAft>
-              <a:defRPr sz="1150">
-                <a:solidFill>
-                  <a:srgbClr val="F8FAFC"/>
-                </a:solidFill>
-                <a:latin typeface="Segoe UI"/>
-              </a:defRPr>
-            </a:pPr>
-            <a:r>
-              <a:t>• Built-in UPI Ticketing: Seamless paid event ticketing with instant QR code admission passes.</a:t>
-            </a:r>
-          </a:p>
-        </p:txBody>
-      </p:sp>
-      <p:sp>
-        <p:nvSpPr>
-          <p:cNvPr id="11" name="Rounded Rectangle 10"/>
+          <p:cNvPr id="6" name="Rounded Rectangle 5"/>
           <p:cNvSpPr/>
           <p:nvPr/>
         </p:nvSpPr>
         <p:spPr>
           <a:xfrm>
-            <a:off x="8046720" y="1920240"/>
-            <a:ext cx="3383280" cy="4297680"/>
+            <a:off x="914400" y="2084832"/>
+            <a:ext cx="548640" cy="73152"/>
           </a:xfrm>
           <a:prstGeom prst="roundRect">
             <a:avLst/>
           </a:prstGeom>
           <a:solidFill>
-            <a:srgbClr val="161C2D"/>
+            <a:srgbClr val="059669"/>
           </a:solidFill>
-          <a:ln w="12700">
-            <a:solidFill>
-              <a:srgbClr val="262E45"/>
-            </a:solidFill>
+          <a:ln>
+            <a:noFill/>
           </a:ln>
         </p:spPr>
         <p:style>
@@ -5641,14 +5783,14 @@
       </p:sp>
       <p:sp>
         <p:nvSpPr>
-          <p:cNvPr id="12" name="TextBox 11"/>
+          <p:cNvPr id="7" name="TextBox 6"/>
           <p:cNvSpPr txBox="1"/>
           <p:nvPr/>
         </p:nvSpPr>
         <p:spPr>
           <a:xfrm>
-            <a:off x="8229600" y="2103120"/>
-            <a:ext cx="3017520" cy="457200"/>
+            <a:off x="914400" y="2212848"/>
+            <a:ext cx="2926080" cy="502920"/>
           </a:xfrm>
           <a:prstGeom prst="rect">
             <a:avLst/>
@@ -5664,27 +5806,27 @@
             <a:pPr>
               <a:defRPr sz="1500" b="1">
                 <a:solidFill>
-                  <a:srgbClr val="A855F7"/>
-                </a:solidFill>
-                <a:latin typeface="Segoe UI"/>
-              </a:defRPr>
-            </a:pPr>
-            <a:r>
-              <a:t>Societal &amp; Economic Impact</a:t>
-            </a:r>
-          </a:p>
-        </p:txBody>
-      </p:sp>
-      <p:sp>
-        <p:nvSpPr>
-          <p:cNvPr id="13" name="TextBox 12"/>
+                  <a:srgbClr val="0F172A"/>
+                </a:solidFill>
+                <a:latin typeface="Segoe UI"/>
+              </a:defRPr>
+            </a:pPr>
+            <a:r>
+              <a:t>Zero-Cost Operational Model</a:t>
+            </a:r>
+          </a:p>
+        </p:txBody>
+      </p:sp>
+      <p:sp>
+        <p:nvSpPr>
+          <p:cNvPr id="8" name="TextBox 7"/>
           <p:cNvSpPr txBox="1"/>
           <p:nvPr/>
         </p:nvSpPr>
         <p:spPr>
           <a:xfrm>
-            <a:off x="8229600" y="2560320"/>
-            <a:ext cx="3017520" cy="3520440"/>
+            <a:off x="914400" y="2724912"/>
+            <a:ext cx="2926080" cy="3383280"/>
           </a:xfrm>
           <a:prstGeom prst="rect">
             <a:avLst/>
@@ -5699,49 +5841,471 @@
           <a:p>
             <a:pPr>
               <a:spcAft>
-                <a:spcPts val="800"/>
+                <a:spcPts val="700"/>
               </a:spcAft>
               <a:defRPr sz="1150">
                 <a:solidFill>
-                  <a:srgbClr val="F8FAFC"/>
-                </a:solidFill>
-                <a:latin typeface="Segoe UI"/>
-              </a:defRPr>
-            </a:pPr>
-            <a:r>
-              <a:t>• Revitalizing Local Spaces: Drives traffic to indie cafes, makerspaces, and community centers.</a:t>
+                  <a:srgbClr val="334155"/>
+                </a:solidFill>
+                <a:latin typeface="Segoe UI"/>
+              </a:defRPr>
+            </a:pPr>
+            <a:r>
+              <a:t>• 100% Free-Tier Architecture: Hosted on Supabase (PostgreSQL + PostGIS) &amp; Vercel Edge Serverless.</a:t>
             </a:r>
           </a:p>
           <a:p>
             <a:pPr>
               <a:spcAft>
-                <a:spcPts val="800"/>
+                <a:spcPts val="700"/>
               </a:spcAft>
               <a:defRPr sz="1150">
                 <a:solidFill>
-                  <a:srgbClr val="F8FAFC"/>
-                </a:solidFill>
-                <a:latin typeface="Segoe UI"/>
-              </a:defRPr>
-            </a:pPr>
-            <a:r>
-              <a:t>• Fostering Tech Collaborations: Direct serendipity for founders, designers, and engineers.</a:t>
+                  <a:srgbClr val="334155"/>
+                </a:solidFill>
+                <a:latin typeface="Segoe UI"/>
+              </a:defRPr>
+            </a:pPr>
+            <a:r>
+              <a:t>• Zero Map API Burn: Using external Google Maps redirection instead of paid embedded tiles saves $200-$1000/month.</a:t>
             </a:r>
           </a:p>
           <a:p>
             <a:pPr>
               <a:spcAft>
-                <a:spcPts val="800"/>
+                <a:spcPts val="700"/>
               </a:spcAft>
               <a:defRPr sz="1150">
                 <a:solidFill>
-                  <a:srgbClr val="F8FAFC"/>
-                </a:solidFill>
-                <a:latin typeface="Segoe UI"/>
-              </a:defRPr>
-            </a:pPr>
-            <a:r>
-              <a:t>• True Digital Inclusivity: Accessible HIG design, full keyboard navigation, and lightweight data consumption on mobile 4G/5G networks.</a:t>
+                  <a:srgbClr val="334155"/>
+                </a:solidFill>
+                <a:latin typeface="Segoe UI"/>
+              </a:defRPr>
+            </a:pPr>
+            <a:r>
+              <a:t>• Lightweight client bundle with Turbopack, SSR caching, and zero heavy dependencies.</a:t>
+            </a:r>
+          </a:p>
+          <a:p>
+            <a:pPr>
+              <a:spcAft>
+                <a:spcPts val="700"/>
+              </a:spcAft>
+              <a:defRPr sz="1150">
+                <a:solidFill>
+                  <a:srgbClr val="334155"/>
+                </a:solidFill>
+                <a:latin typeface="Segoe UI"/>
+              </a:defRPr>
+            </a:pPr>
+            <a:r>
+              <a:t>• Instant deployment readiness with automated CI/CD on Vercel.</a:t>
+            </a:r>
+          </a:p>
+        </p:txBody>
+      </p:sp>
+      <p:sp>
+        <p:nvSpPr>
+          <p:cNvPr id="9" name="Rounded Rectangle 8"/>
+          <p:cNvSpPr/>
+          <p:nvPr/>
+        </p:nvSpPr>
+        <p:spPr>
+          <a:xfrm>
+            <a:off x="4389120" y="1920240"/>
+            <a:ext cx="3291840" cy="4297680"/>
+          </a:xfrm>
+          <a:prstGeom prst="roundRect">
+            <a:avLst/>
+          </a:prstGeom>
+          <a:solidFill>
+            <a:srgbClr val="FFFFFF"/>
+          </a:solidFill>
+          <a:ln w="12700">
+            <a:solidFill>
+              <a:srgbClr val="E2E8F0"/>
+            </a:solidFill>
+          </a:ln>
+        </p:spPr>
+        <p:style>
+          <a:lnRef idx="1">
+            <a:schemeClr val="accent1"/>
+          </a:lnRef>
+          <a:fillRef idx="3">
+            <a:schemeClr val="accent1"/>
+          </a:fillRef>
+          <a:effectRef idx="2">
+            <a:schemeClr val="accent1"/>
+          </a:effectRef>
+          <a:fontRef idx="minor">
+            <a:schemeClr val="lt1"/>
+          </a:fontRef>
+        </p:style>
+        <p:txBody>
+          <a:bodyPr rtlCol="0" anchor="ctr"/>
+          <a:lstStyle/>
+          <a:p>
+            <a:pPr algn="ctr"/>
+          </a:p>
+        </p:txBody>
+      </p:sp>
+      <p:sp>
+        <p:nvSpPr>
+          <p:cNvPr id="10" name="Rounded Rectangle 9"/>
+          <p:cNvSpPr/>
+          <p:nvPr/>
+        </p:nvSpPr>
+        <p:spPr>
+          <a:xfrm>
+            <a:off x="4572000" y="2084832"/>
+            <a:ext cx="548640" cy="73152"/>
+          </a:xfrm>
+          <a:prstGeom prst="roundRect">
+            <a:avLst/>
+          </a:prstGeom>
+          <a:solidFill>
+            <a:srgbClr val="2563EB"/>
+          </a:solidFill>
+          <a:ln>
+            <a:noFill/>
+          </a:ln>
+        </p:spPr>
+        <p:style>
+          <a:lnRef idx="1">
+            <a:schemeClr val="accent1"/>
+          </a:lnRef>
+          <a:fillRef idx="3">
+            <a:schemeClr val="accent1"/>
+          </a:fillRef>
+          <a:effectRef idx="2">
+            <a:schemeClr val="accent1"/>
+          </a:effectRef>
+          <a:fontRef idx="minor">
+            <a:schemeClr val="lt1"/>
+          </a:fontRef>
+        </p:style>
+        <p:txBody>
+          <a:bodyPr rtlCol="0" anchor="ctr"/>
+          <a:lstStyle/>
+          <a:p>
+            <a:pPr algn="ctr"/>
+          </a:p>
+        </p:txBody>
+      </p:sp>
+      <p:sp>
+        <p:nvSpPr>
+          <p:cNvPr id="11" name="TextBox 10"/>
+          <p:cNvSpPr txBox="1"/>
+          <p:nvPr/>
+        </p:nvSpPr>
+        <p:spPr>
+          <a:xfrm>
+            <a:off x="4572000" y="2212848"/>
+            <a:ext cx="2926080" cy="502920"/>
+          </a:xfrm>
+          <a:prstGeom prst="rect">
+            <a:avLst/>
+          </a:prstGeom>
+          <a:noFill/>
+        </p:spPr>
+        <p:txBody>
+          <a:bodyPr wrap="square">
+            <a:spAutoFit/>
+          </a:bodyPr>
+          <a:lstStyle/>
+          <a:p>
+            <a:pPr>
+              <a:defRPr sz="1500" b="1">
+                <a:solidFill>
+                  <a:srgbClr val="0F172A"/>
+                </a:solidFill>
+                <a:latin typeface="Segoe UI"/>
+              </a:defRPr>
+            </a:pPr>
+            <a:r>
+              <a:t>Technical Scalability</a:t>
+            </a:r>
+          </a:p>
+        </p:txBody>
+      </p:sp>
+      <p:sp>
+        <p:nvSpPr>
+          <p:cNvPr id="12" name="TextBox 11"/>
+          <p:cNvSpPr txBox="1"/>
+          <p:nvPr/>
+        </p:nvSpPr>
+        <p:spPr>
+          <a:xfrm>
+            <a:off x="4572000" y="2724912"/>
+            <a:ext cx="2926080" cy="3383280"/>
+          </a:xfrm>
+          <a:prstGeom prst="rect">
+            <a:avLst/>
+          </a:prstGeom>
+          <a:noFill/>
+        </p:spPr>
+        <p:txBody>
+          <a:bodyPr wrap="square">
+            <a:spAutoFit/>
+          </a:bodyPr>
+          <a:lstStyle/>
+          <a:p>
+            <a:pPr>
+              <a:spcAft>
+                <a:spcPts val="700"/>
+              </a:spcAft>
+              <a:defRPr sz="1150">
+                <a:solidFill>
+                  <a:srgbClr val="334155"/>
+                </a:solidFill>
+                <a:latin typeface="Segoe UI"/>
+              </a:defRPr>
+            </a:pPr>
+            <a:r>
+              <a:t>• PostGIS GiST indexing handles 500,000+ localized coordinate pins with O(log N) bounding box lookup.</a:t>
+            </a:r>
+          </a:p>
+          <a:p>
+            <a:pPr>
+              <a:spcAft>
+                <a:spcPts val="700"/>
+              </a:spcAft>
+              <a:defRPr sz="1150">
+                <a:solidFill>
+                  <a:srgbClr val="334155"/>
+                </a:solidFill>
+                <a:latin typeface="Segoe UI"/>
+              </a:defRPr>
+            </a:pPr>
+            <a:r>
+              <a:t>• Stateless Next.js edge handlers handle traffic spikes during major viral community events.</a:t>
+            </a:r>
+          </a:p>
+          <a:p>
+            <a:pPr>
+              <a:spcAft>
+                <a:spcPts val="700"/>
+              </a:spcAft>
+              <a:defRPr sz="1150">
+                <a:solidFill>
+                  <a:srgbClr val="334155"/>
+                </a:solidFill>
+                <a:latin typeface="Segoe UI"/>
+              </a:defRPr>
+            </a:pPr>
+            <a:r>
+              <a:t>• Connection pooling via Supabase Supavisor prevents database saturation.</a:t>
+            </a:r>
+          </a:p>
+          <a:p>
+            <a:pPr>
+              <a:spcAft>
+                <a:spcPts val="700"/>
+              </a:spcAft>
+              <a:defRPr sz="1150">
+                <a:solidFill>
+                  <a:srgbClr val="334155"/>
+                </a:solidFill>
+                <a:latin typeface="Segoe UI"/>
+              </a:defRPr>
+            </a:pPr>
+            <a:r>
+              <a:t>• Tested &amp; verified: 18/18 routes build cleanly, 0 lint warnings, sub-second TTFB.</a:t>
+            </a:r>
+          </a:p>
+        </p:txBody>
+      </p:sp>
+      <p:sp>
+        <p:nvSpPr>
+          <p:cNvPr id="13" name="Rounded Rectangle 12"/>
+          <p:cNvSpPr/>
+          <p:nvPr/>
+        </p:nvSpPr>
+        <p:spPr>
+          <a:xfrm>
+            <a:off x="8046720" y="1920240"/>
+            <a:ext cx="3383280" cy="4297680"/>
+          </a:xfrm>
+          <a:prstGeom prst="roundRect">
+            <a:avLst/>
+          </a:prstGeom>
+          <a:solidFill>
+            <a:srgbClr val="FFFFFF"/>
+          </a:solidFill>
+          <a:ln w="12700">
+            <a:solidFill>
+              <a:srgbClr val="E2E8F0"/>
+            </a:solidFill>
+          </a:ln>
+        </p:spPr>
+        <p:style>
+          <a:lnRef idx="1">
+            <a:schemeClr val="accent1"/>
+          </a:lnRef>
+          <a:fillRef idx="3">
+            <a:schemeClr val="accent1"/>
+          </a:fillRef>
+          <a:effectRef idx="2">
+            <a:schemeClr val="accent1"/>
+          </a:effectRef>
+          <a:fontRef idx="minor">
+            <a:schemeClr val="lt1"/>
+          </a:fontRef>
+        </p:style>
+        <p:txBody>
+          <a:bodyPr rtlCol="0" anchor="ctr"/>
+          <a:lstStyle/>
+          <a:p>
+            <a:pPr algn="ctr"/>
+          </a:p>
+        </p:txBody>
+      </p:sp>
+      <p:sp>
+        <p:nvSpPr>
+          <p:cNvPr id="14" name="Rounded Rectangle 13"/>
+          <p:cNvSpPr/>
+          <p:nvPr/>
+        </p:nvSpPr>
+        <p:spPr>
+          <a:xfrm>
+            <a:off x="8229600" y="2084832"/>
+            <a:ext cx="548640" cy="73152"/>
+          </a:xfrm>
+          <a:prstGeom prst="roundRect">
+            <a:avLst/>
+          </a:prstGeom>
+          <a:solidFill>
+            <a:srgbClr val="7C3AED"/>
+          </a:solidFill>
+          <a:ln>
+            <a:noFill/>
+          </a:ln>
+        </p:spPr>
+        <p:style>
+          <a:lnRef idx="1">
+            <a:schemeClr val="accent1"/>
+          </a:lnRef>
+          <a:fillRef idx="3">
+            <a:schemeClr val="accent1"/>
+          </a:fillRef>
+          <a:effectRef idx="2">
+            <a:schemeClr val="accent1"/>
+          </a:effectRef>
+          <a:fontRef idx="minor">
+            <a:schemeClr val="lt1"/>
+          </a:fontRef>
+        </p:style>
+        <p:txBody>
+          <a:bodyPr rtlCol="0" anchor="ctr"/>
+          <a:lstStyle/>
+          <a:p>
+            <a:pPr algn="ctr"/>
+          </a:p>
+        </p:txBody>
+      </p:sp>
+      <p:sp>
+        <p:nvSpPr>
+          <p:cNvPr id="15" name="TextBox 14"/>
+          <p:cNvSpPr txBox="1"/>
+          <p:nvPr/>
+        </p:nvSpPr>
+        <p:spPr>
+          <a:xfrm>
+            <a:off x="8229600" y="2212848"/>
+            <a:ext cx="3017520" cy="502920"/>
+          </a:xfrm>
+          <a:prstGeom prst="rect">
+            <a:avLst/>
+          </a:prstGeom>
+          <a:noFill/>
+        </p:spPr>
+        <p:txBody>
+          <a:bodyPr wrap="square">
+            <a:spAutoFit/>
+          </a:bodyPr>
+          <a:lstStyle/>
+          <a:p>
+            <a:pPr>
+              <a:defRPr sz="1500" b="1">
+                <a:solidFill>
+                  <a:srgbClr val="0F172A"/>
+                </a:solidFill>
+                <a:latin typeface="Segoe UI"/>
+              </a:defRPr>
+            </a:pPr>
+            <a:r>
+              <a:t>Multi-Stream Monetization</a:t>
+            </a:r>
+          </a:p>
+        </p:txBody>
+      </p:sp>
+      <p:sp>
+        <p:nvSpPr>
+          <p:cNvPr id="16" name="TextBox 15"/>
+          <p:cNvSpPr txBox="1"/>
+          <p:nvPr/>
+        </p:nvSpPr>
+        <p:spPr>
+          <a:xfrm>
+            <a:off x="8229600" y="2724912"/>
+            <a:ext cx="3017520" cy="3383280"/>
+          </a:xfrm>
+          <a:prstGeom prst="rect">
+            <a:avLst/>
+          </a:prstGeom>
+          <a:noFill/>
+        </p:spPr>
+        <p:txBody>
+          <a:bodyPr wrap="square">
+            <a:spAutoFit/>
+          </a:bodyPr>
+          <a:lstStyle/>
+          <a:p>
+            <a:pPr>
+              <a:spcAft>
+                <a:spcPts val="700"/>
+              </a:spcAft>
+              <a:defRPr sz="1150">
+                <a:solidFill>
+                  <a:srgbClr val="334155"/>
+                </a:solidFill>
+                <a:latin typeface="Segoe UI"/>
+              </a:defRPr>
+            </a:pPr>
+            <a:r>
+              <a:t>• 1. 'Radar Boost' (Featured Pins): Promoted visibility for hackathons, conferences, and startup launches.</a:t>
+            </a:r>
+          </a:p>
+          <a:p>
+            <a:pPr>
+              <a:spcAft>
+                <a:spcPts val="700"/>
+              </a:spcAft>
+              <a:defRPr sz="1150">
+                <a:solidFill>
+                  <a:srgbClr val="334155"/>
+                </a:solidFill>
+                <a:latin typeface="Segoe UI"/>
+              </a:defRPr>
+            </a:pPr>
+            <a:r>
+              <a:t>• 2. Ticketing Convenience Fee: Transparent 2-3% processing fee on paid workshops and concerts via UPI.</a:t>
+            </a:r>
+          </a:p>
+          <a:p>
+            <a:pPr>
+              <a:spcAft>
+                <a:spcPts val="700"/>
+              </a:spcAft>
+              <a:defRPr sz="1150">
+                <a:solidFill>
+                  <a:srgbClr val="334155"/>
+                </a:solidFill>
+                <a:latin typeface="Segoe UI"/>
+              </a:defRPr>
+            </a:pPr>
+            <a:r>
+              <a:t>• 3. Venue Sponsorships: Co-working spaces and cafe hubs sponsor neighborhood radars to drive footfall.</a:t>
             </a:r>
           </a:p>
         </p:txBody>
@@ -5760,7 +6324,7 @@
     <p:bg>
       <p:bgPr>
         <a:solidFill>
-          <a:srgbClr val="0B0F19"/>
+          <a:srgbClr val="F8FAFC"/>
         </a:solidFill>
         <a:effectLst/>
       </p:bgPr>
@@ -5774,14 +6338,69 @@
       <p:grpSpPr/>
       <p:sp>
         <p:nvSpPr>
-          <p:cNvPr id="2" name="TextBox 1"/>
+          <p:cNvPr id="2" name="Rounded Rectangle 1"/>
+          <p:cNvSpPr/>
+          <p:nvPr/>
+        </p:nvSpPr>
+        <p:spPr>
+          <a:xfrm>
+            <a:off x="731520" y="384048"/>
+            <a:ext cx="3931920" cy="292608"/>
+          </a:xfrm>
+          <a:prstGeom prst="roundRect">
+            <a:avLst/>
+          </a:prstGeom>
+          <a:solidFill>
+            <a:srgbClr val="EEF2FF"/>
+          </a:solidFill>
+          <a:ln w="12700">
+            <a:solidFill>
+              <a:srgbClr val="C7D2FE"/>
+            </a:solidFill>
+          </a:ln>
+        </p:spPr>
+        <p:style>
+          <a:lnRef idx="1">
+            <a:schemeClr val="accent1"/>
+          </a:lnRef>
+          <a:fillRef idx="3">
+            <a:schemeClr val="accent1"/>
+          </a:fillRef>
+          <a:effectRef idx="2">
+            <a:schemeClr val="accent1"/>
+          </a:effectRef>
+          <a:fontRef idx="minor">
+            <a:schemeClr val="lt1"/>
+          </a:fontRef>
+        </p:style>
+        <p:txBody>
+          <a:bodyPr rtlCol="0" anchor="ctr" wrap="square"/>
+          <a:lstStyle/>
+          <a:p>
+            <a:pPr algn="ctr">
+              <a:defRPr sz="950" b="1">
+                <a:solidFill>
+                  <a:srgbClr val="2563EB"/>
+                </a:solidFill>
+                <a:latin typeface="Segoe UI"/>
+              </a:defRPr>
+            </a:pPr>
+            <a:r>
+              <a:t>EVENT RADAR  •  SLIDE 05 OF 6  •  TEAM VP BOYS</a:t>
+            </a:r>
+          </a:p>
+        </p:txBody>
+      </p:sp>
+      <p:sp>
+        <p:nvSpPr>
+          <p:cNvPr id="3" name="TextBox 2"/>
           <p:cNvSpPr txBox="1"/>
           <p:nvPr/>
         </p:nvSpPr>
         <p:spPr>
           <a:xfrm>
-            <a:off x="731520" y="411480"/>
-            <a:ext cx="7315200" cy="320040"/>
+            <a:off x="731520" y="731520"/>
+            <a:ext cx="10698480" cy="621792"/>
           </a:xfrm>
           <a:prstGeom prst="rect">
             <a:avLst/>
@@ -5795,29 +6414,29 @@
           <a:lstStyle/>
           <a:p>
             <a:pPr>
-              <a:defRPr sz="1000" b="1">
-                <a:solidFill>
-                  <a:srgbClr val="06B6D4"/>
-                </a:solidFill>
-                <a:latin typeface="Segoe UI"/>
-              </a:defRPr>
-            </a:pPr>
-            <a:r>
-              <a:t>EVENT RADAR  •  SLIDE 05 OF 5  •  VECNAVERSE HACKATHON</a:t>
-            </a:r>
-          </a:p>
-        </p:txBody>
-      </p:sp>
-      <p:sp>
-        <p:nvSpPr>
-          <p:cNvPr id="3" name="TextBox 2"/>
+              <a:defRPr sz="2600" b="1">
+                <a:solidFill>
+                  <a:srgbClr val="0F172A"/>
+                </a:solidFill>
+                <a:latin typeface="Segoe UI"/>
+              </a:defRPr>
+            </a:pPr>
+            <a:r>
+              <a:t>Impact &amp; Benefit</a:t>
+            </a:r>
+          </a:p>
+        </p:txBody>
+      </p:sp>
+      <p:sp>
+        <p:nvSpPr>
+          <p:cNvPr id="4" name="TextBox 3"/>
           <p:cNvSpPr txBox="1"/>
           <p:nvPr/>
         </p:nvSpPr>
         <p:spPr>
           <a:xfrm>
-            <a:off x="731520" y="685800"/>
-            <a:ext cx="10515600" cy="685800"/>
+            <a:off x="731520" y="1353312"/>
+            <a:ext cx="10698480" cy="384048"/>
           </a:xfrm>
           <a:prstGeom prst="rect">
             <a:avLst/>
@@ -5831,29 +6450,117 @@
           <a:lstStyle/>
           <a:p>
             <a:pPr>
-              <a:defRPr sz="2600" b="1">
-                <a:solidFill>
-                  <a:srgbClr val="F8FAFC"/>
-                </a:solidFill>
-                <a:latin typeface="Segoe UI"/>
-              </a:defRPr>
-            </a:pPr>
-            <a:r>
-              <a:t>Comparison with Existing Platforms</a:t>
-            </a:r>
-          </a:p>
-        </p:txBody>
-      </p:sp>
-      <p:sp>
-        <p:nvSpPr>
-          <p:cNvPr id="4" name="TextBox 3"/>
+              <a:defRPr sz="1300">
+                <a:solidFill>
+                  <a:srgbClr val="64748B"/>
+                </a:solidFill>
+                <a:latin typeface="Segoe UI"/>
+              </a:defRPr>
+            </a:pPr>
+            <a:r>
+              <a:t>Transforming urban socialization and hyper-charging India's grassroots tech ecosystem.</a:t>
+            </a:r>
+          </a:p>
+        </p:txBody>
+      </p:sp>
+      <p:sp>
+        <p:nvSpPr>
+          <p:cNvPr id="5" name="Rounded Rectangle 4"/>
+          <p:cNvSpPr/>
+          <p:nvPr/>
+        </p:nvSpPr>
+        <p:spPr>
+          <a:xfrm>
+            <a:off x="731520" y="1920240"/>
+            <a:ext cx="3291840" cy="4297680"/>
+          </a:xfrm>
+          <a:prstGeom prst="roundRect">
+            <a:avLst/>
+          </a:prstGeom>
+          <a:solidFill>
+            <a:srgbClr val="FFFFFF"/>
+          </a:solidFill>
+          <a:ln w="12700">
+            <a:solidFill>
+              <a:srgbClr val="E2E8F0"/>
+            </a:solidFill>
+          </a:ln>
+        </p:spPr>
+        <p:style>
+          <a:lnRef idx="1">
+            <a:schemeClr val="accent1"/>
+          </a:lnRef>
+          <a:fillRef idx="3">
+            <a:schemeClr val="accent1"/>
+          </a:fillRef>
+          <a:effectRef idx="2">
+            <a:schemeClr val="accent1"/>
+          </a:effectRef>
+          <a:fontRef idx="minor">
+            <a:schemeClr val="lt1"/>
+          </a:fontRef>
+        </p:style>
+        <p:txBody>
+          <a:bodyPr rtlCol="0" anchor="ctr"/>
+          <a:lstStyle/>
+          <a:p>
+            <a:pPr algn="ctr"/>
+          </a:p>
+        </p:txBody>
+      </p:sp>
+      <p:sp>
+        <p:nvSpPr>
+          <p:cNvPr id="6" name="Rounded Rectangle 5"/>
+          <p:cNvSpPr/>
+          <p:nvPr/>
+        </p:nvSpPr>
+        <p:spPr>
+          <a:xfrm>
+            <a:off x="914400" y="2084832"/>
+            <a:ext cx="548640" cy="73152"/>
+          </a:xfrm>
+          <a:prstGeom prst="roundRect">
+            <a:avLst/>
+          </a:prstGeom>
+          <a:solidFill>
+            <a:srgbClr val="0284C7"/>
+          </a:solidFill>
+          <a:ln>
+            <a:noFill/>
+          </a:ln>
+        </p:spPr>
+        <p:style>
+          <a:lnRef idx="1">
+            <a:schemeClr val="accent1"/>
+          </a:lnRef>
+          <a:fillRef idx="3">
+            <a:schemeClr val="accent1"/>
+          </a:fillRef>
+          <a:effectRef idx="2">
+            <a:schemeClr val="accent1"/>
+          </a:effectRef>
+          <a:fontRef idx="minor">
+            <a:schemeClr val="lt1"/>
+          </a:fontRef>
+        </p:style>
+        <p:txBody>
+          <a:bodyPr rtlCol="0" anchor="ctr"/>
+          <a:lstStyle/>
+          <a:p>
+            <a:pPr algn="ctr"/>
+          </a:p>
+        </p:txBody>
+      </p:sp>
+      <p:sp>
+        <p:nvSpPr>
+          <p:cNvPr id="7" name="TextBox 6"/>
           <p:cNvSpPr txBox="1"/>
           <p:nvPr/>
         </p:nvSpPr>
         <p:spPr>
           <a:xfrm>
-            <a:off x="731520" y="1371600"/>
-            <a:ext cx="10515600" cy="411480"/>
+            <a:off x="914400" y="2212848"/>
+            <a:ext cx="2926080" cy="502920"/>
           </a:xfrm>
           <a:prstGeom prst="rect">
             <a:avLst/>
@@ -5867,9 +6574,655 @@
           <a:lstStyle/>
           <a:p>
             <a:pPr>
+              <a:defRPr sz="1500" b="1">
+                <a:solidFill>
+                  <a:srgbClr val="0F172A"/>
+                </a:solidFill>
+                <a:latin typeface="Segoe UI"/>
+              </a:defRPr>
+            </a:pPr>
+            <a:r>
+              <a:t>For Attendees &amp; Builders</a:t>
+            </a:r>
+          </a:p>
+        </p:txBody>
+      </p:sp>
+      <p:sp>
+        <p:nvSpPr>
+          <p:cNvPr id="8" name="TextBox 7"/>
+          <p:cNvSpPr txBox="1"/>
+          <p:nvPr/>
+        </p:nvSpPr>
+        <p:spPr>
+          <a:xfrm>
+            <a:off x="914400" y="2724912"/>
+            <a:ext cx="2926080" cy="3383280"/>
+          </a:xfrm>
+          <a:prstGeom prst="rect">
+            <a:avLst/>
+          </a:prstGeom>
+          <a:noFill/>
+        </p:spPr>
+        <p:txBody>
+          <a:bodyPr wrap="square">
+            <a:spAutoFit/>
+          </a:bodyPr>
+          <a:lstStyle/>
+          <a:p>
+            <a:pPr>
+              <a:spcAft>
+                <a:spcPts val="700"/>
+              </a:spcAft>
+              <a:defRPr sz="1150">
+                <a:solidFill>
+                  <a:srgbClr val="334155"/>
+                </a:solidFill>
+                <a:latin typeface="Segoe UI"/>
+              </a:defRPr>
+            </a:pPr>
+            <a:r>
+              <a:t>• Eliminates Urban FOMO: Instantly see what meetups, jams, or hackathons are happening within 5km.</a:t>
+            </a:r>
+          </a:p>
+          <a:p>
+            <a:pPr>
+              <a:spcAft>
+                <a:spcPts val="700"/>
+              </a:spcAft>
+              <a:defRPr sz="1150">
+                <a:solidFill>
+                  <a:srgbClr val="334155"/>
+                </a:solidFill>
+                <a:latin typeface="Segoe UI"/>
+              </a:defRPr>
+            </a:pPr>
+            <a:r>
+              <a:t>• Saved Commute Time: Stops users from traveling across congested metros for low-relevance events.</a:t>
+            </a:r>
+          </a:p>
+          <a:p>
+            <a:pPr>
+              <a:spcAft>
+                <a:spcPts val="700"/>
+              </a:spcAft>
+              <a:defRPr sz="1150">
+                <a:solidFill>
+                  <a:srgbClr val="334155"/>
+                </a:solidFill>
+                <a:latin typeface="Segoe UI"/>
+              </a:defRPr>
+            </a:pPr>
+            <a:r>
+              <a:t>• Frictionless Attendance: 1-click RSVP with real-time attendee tracking and automatic Google/iCal calendar sync.</a:t>
+            </a:r>
+          </a:p>
+          <a:p>
+            <a:pPr>
+              <a:spcAft>
+                <a:spcPts val="700"/>
+              </a:spcAft>
+              <a:defRPr sz="1150">
+                <a:solidFill>
+                  <a:srgbClr val="334155"/>
+                </a:solidFill>
+                <a:latin typeface="Segoe UI"/>
+              </a:defRPr>
+            </a:pPr>
+            <a:r>
+              <a:t>• Community Discussion Wall: Ask organizers questions directly on the event page before arriving.</a:t>
+            </a:r>
+          </a:p>
+        </p:txBody>
+      </p:sp>
+      <p:sp>
+        <p:nvSpPr>
+          <p:cNvPr id="9" name="Rounded Rectangle 8"/>
+          <p:cNvSpPr/>
+          <p:nvPr/>
+        </p:nvSpPr>
+        <p:spPr>
+          <a:xfrm>
+            <a:off x="4389120" y="1920240"/>
+            <a:ext cx="3291840" cy="4297680"/>
+          </a:xfrm>
+          <a:prstGeom prst="roundRect">
+            <a:avLst/>
+          </a:prstGeom>
+          <a:solidFill>
+            <a:srgbClr val="FFFFFF"/>
+          </a:solidFill>
+          <a:ln w="12700">
+            <a:solidFill>
+              <a:srgbClr val="E2E8F0"/>
+            </a:solidFill>
+          </a:ln>
+        </p:spPr>
+        <p:style>
+          <a:lnRef idx="1">
+            <a:schemeClr val="accent1"/>
+          </a:lnRef>
+          <a:fillRef idx="3">
+            <a:schemeClr val="accent1"/>
+          </a:fillRef>
+          <a:effectRef idx="2">
+            <a:schemeClr val="accent1"/>
+          </a:effectRef>
+          <a:fontRef idx="minor">
+            <a:schemeClr val="lt1"/>
+          </a:fontRef>
+        </p:style>
+        <p:txBody>
+          <a:bodyPr rtlCol="0" anchor="ctr"/>
+          <a:lstStyle/>
+          <a:p>
+            <a:pPr algn="ctr"/>
+          </a:p>
+        </p:txBody>
+      </p:sp>
+      <p:sp>
+        <p:nvSpPr>
+          <p:cNvPr id="10" name="Rounded Rectangle 9"/>
+          <p:cNvSpPr/>
+          <p:nvPr/>
+        </p:nvSpPr>
+        <p:spPr>
+          <a:xfrm>
+            <a:off x="4572000" y="2084832"/>
+            <a:ext cx="548640" cy="73152"/>
+          </a:xfrm>
+          <a:prstGeom prst="roundRect">
+            <a:avLst/>
+          </a:prstGeom>
+          <a:solidFill>
+            <a:srgbClr val="059669"/>
+          </a:solidFill>
+          <a:ln>
+            <a:noFill/>
+          </a:ln>
+        </p:spPr>
+        <p:style>
+          <a:lnRef idx="1">
+            <a:schemeClr val="accent1"/>
+          </a:lnRef>
+          <a:fillRef idx="3">
+            <a:schemeClr val="accent1"/>
+          </a:fillRef>
+          <a:effectRef idx="2">
+            <a:schemeClr val="accent1"/>
+          </a:effectRef>
+          <a:fontRef idx="minor">
+            <a:schemeClr val="lt1"/>
+          </a:fontRef>
+        </p:style>
+        <p:txBody>
+          <a:bodyPr rtlCol="0" anchor="ctr"/>
+          <a:lstStyle/>
+          <a:p>
+            <a:pPr algn="ctr"/>
+          </a:p>
+        </p:txBody>
+      </p:sp>
+      <p:sp>
+        <p:nvSpPr>
+          <p:cNvPr id="11" name="TextBox 10"/>
+          <p:cNvSpPr txBox="1"/>
+          <p:nvPr/>
+        </p:nvSpPr>
+        <p:spPr>
+          <a:xfrm>
+            <a:off x="4572000" y="2212848"/>
+            <a:ext cx="2926080" cy="502920"/>
+          </a:xfrm>
+          <a:prstGeom prst="rect">
+            <a:avLst/>
+          </a:prstGeom>
+          <a:noFill/>
+        </p:spPr>
+        <p:txBody>
+          <a:bodyPr wrap="square">
+            <a:spAutoFit/>
+          </a:bodyPr>
+          <a:lstStyle/>
+          <a:p>
+            <a:pPr>
+              <a:defRPr sz="1500" b="1">
+                <a:solidFill>
+                  <a:srgbClr val="0F172A"/>
+                </a:solidFill>
+                <a:latin typeface="Segoe UI"/>
+              </a:defRPr>
+            </a:pPr>
+            <a:r>
+              <a:t>For Grassroots Organizers</a:t>
+            </a:r>
+          </a:p>
+        </p:txBody>
+      </p:sp>
+      <p:sp>
+        <p:nvSpPr>
+          <p:cNvPr id="12" name="TextBox 11"/>
+          <p:cNvSpPr txBox="1"/>
+          <p:nvPr/>
+        </p:nvSpPr>
+        <p:spPr>
+          <a:xfrm>
+            <a:off x="4572000" y="2724912"/>
+            <a:ext cx="2926080" cy="3383280"/>
+          </a:xfrm>
+          <a:prstGeom prst="rect">
+            <a:avLst/>
+          </a:prstGeom>
+          <a:noFill/>
+        </p:spPr>
+        <p:txBody>
+          <a:bodyPr wrap="square">
+            <a:spAutoFit/>
+          </a:bodyPr>
+          <a:lstStyle/>
+          <a:p>
+            <a:pPr>
+              <a:spcAft>
+                <a:spcPts val="700"/>
+              </a:spcAft>
+              <a:defRPr sz="1150">
+                <a:solidFill>
+                  <a:srgbClr val="334155"/>
+                </a:solidFill>
+                <a:latin typeface="Segoe UI"/>
+              </a:defRPr>
+            </a:pPr>
+            <a:r>
+              <a:t>• Sub-60s Event Setup: Paste a Google Maps link and title; no coordinate lookups or forms.</a:t>
+            </a:r>
+          </a:p>
+          <a:p>
+            <a:pPr>
+              <a:spcAft>
+                <a:spcPts val="700"/>
+              </a:spcAft>
+              <a:defRPr sz="1150">
+                <a:solidFill>
+                  <a:srgbClr val="334155"/>
+                </a:solidFill>
+                <a:latin typeface="Segoe UI"/>
+              </a:defRPr>
+            </a:pPr>
+            <a:r>
+              <a:t>• 100% Free Hosting: No monthly SaaS subscription like Meetup.com ($35/mo).</a:t>
+            </a:r>
+          </a:p>
+          <a:p>
+            <a:pPr>
+              <a:spcAft>
+                <a:spcPts val="700"/>
+              </a:spcAft>
+              <a:defRPr sz="1150">
+                <a:solidFill>
+                  <a:srgbClr val="334155"/>
+                </a:solidFill>
+                <a:latin typeface="Segoe UI"/>
+              </a:defRPr>
+            </a:pPr>
+            <a:r>
+              <a:t>• Dedicated Organizer Hub: Real-time attendee roster, RSVP count, event edit/cancel controls at /profile/my-events.</a:t>
+            </a:r>
+          </a:p>
+          <a:p>
+            <a:pPr>
+              <a:spcAft>
+                <a:spcPts val="700"/>
+              </a:spcAft>
+              <a:defRPr sz="1150">
+                <a:solidFill>
+                  <a:srgbClr val="334155"/>
+                </a:solidFill>
+                <a:latin typeface="Segoe UI"/>
+              </a:defRPr>
+            </a:pPr>
+            <a:r>
+              <a:t>• Built-in UPI Ticketing: Seamless paid event ticketing with instant QR code admission passes.</a:t>
+            </a:r>
+          </a:p>
+        </p:txBody>
+      </p:sp>
+      <p:sp>
+        <p:nvSpPr>
+          <p:cNvPr id="13" name="Rounded Rectangle 12"/>
+          <p:cNvSpPr/>
+          <p:nvPr/>
+        </p:nvSpPr>
+        <p:spPr>
+          <a:xfrm>
+            <a:off x="8046720" y="1920240"/>
+            <a:ext cx="3383280" cy="4297680"/>
+          </a:xfrm>
+          <a:prstGeom prst="roundRect">
+            <a:avLst/>
+          </a:prstGeom>
+          <a:solidFill>
+            <a:srgbClr val="FFFFFF"/>
+          </a:solidFill>
+          <a:ln w="12700">
+            <a:solidFill>
+              <a:srgbClr val="E2E8F0"/>
+            </a:solidFill>
+          </a:ln>
+        </p:spPr>
+        <p:style>
+          <a:lnRef idx="1">
+            <a:schemeClr val="accent1"/>
+          </a:lnRef>
+          <a:fillRef idx="3">
+            <a:schemeClr val="accent1"/>
+          </a:fillRef>
+          <a:effectRef idx="2">
+            <a:schemeClr val="accent1"/>
+          </a:effectRef>
+          <a:fontRef idx="minor">
+            <a:schemeClr val="lt1"/>
+          </a:fontRef>
+        </p:style>
+        <p:txBody>
+          <a:bodyPr rtlCol="0" anchor="ctr"/>
+          <a:lstStyle/>
+          <a:p>
+            <a:pPr algn="ctr"/>
+          </a:p>
+        </p:txBody>
+      </p:sp>
+      <p:sp>
+        <p:nvSpPr>
+          <p:cNvPr id="14" name="Rounded Rectangle 13"/>
+          <p:cNvSpPr/>
+          <p:nvPr/>
+        </p:nvSpPr>
+        <p:spPr>
+          <a:xfrm>
+            <a:off x="8229600" y="2084832"/>
+            <a:ext cx="548640" cy="73152"/>
+          </a:xfrm>
+          <a:prstGeom prst="roundRect">
+            <a:avLst/>
+          </a:prstGeom>
+          <a:solidFill>
+            <a:srgbClr val="7C3AED"/>
+          </a:solidFill>
+          <a:ln>
+            <a:noFill/>
+          </a:ln>
+        </p:spPr>
+        <p:style>
+          <a:lnRef idx="1">
+            <a:schemeClr val="accent1"/>
+          </a:lnRef>
+          <a:fillRef idx="3">
+            <a:schemeClr val="accent1"/>
+          </a:fillRef>
+          <a:effectRef idx="2">
+            <a:schemeClr val="accent1"/>
+          </a:effectRef>
+          <a:fontRef idx="minor">
+            <a:schemeClr val="lt1"/>
+          </a:fontRef>
+        </p:style>
+        <p:txBody>
+          <a:bodyPr rtlCol="0" anchor="ctr"/>
+          <a:lstStyle/>
+          <a:p>
+            <a:pPr algn="ctr"/>
+          </a:p>
+        </p:txBody>
+      </p:sp>
+      <p:sp>
+        <p:nvSpPr>
+          <p:cNvPr id="15" name="TextBox 14"/>
+          <p:cNvSpPr txBox="1"/>
+          <p:nvPr/>
+        </p:nvSpPr>
+        <p:spPr>
+          <a:xfrm>
+            <a:off x="8229600" y="2212848"/>
+            <a:ext cx="3017520" cy="502920"/>
+          </a:xfrm>
+          <a:prstGeom prst="rect">
+            <a:avLst/>
+          </a:prstGeom>
+          <a:noFill/>
+        </p:spPr>
+        <p:txBody>
+          <a:bodyPr wrap="square">
+            <a:spAutoFit/>
+          </a:bodyPr>
+          <a:lstStyle/>
+          <a:p>
+            <a:pPr>
+              <a:defRPr sz="1500" b="1">
+                <a:solidFill>
+                  <a:srgbClr val="0F172A"/>
+                </a:solidFill>
+                <a:latin typeface="Segoe UI"/>
+              </a:defRPr>
+            </a:pPr>
+            <a:r>
+              <a:t>Societal &amp; Economic Impact</a:t>
+            </a:r>
+          </a:p>
+        </p:txBody>
+      </p:sp>
+      <p:sp>
+        <p:nvSpPr>
+          <p:cNvPr id="16" name="TextBox 15"/>
+          <p:cNvSpPr txBox="1"/>
+          <p:nvPr/>
+        </p:nvSpPr>
+        <p:spPr>
+          <a:xfrm>
+            <a:off x="8229600" y="2724912"/>
+            <a:ext cx="3017520" cy="3383280"/>
+          </a:xfrm>
+          <a:prstGeom prst="rect">
+            <a:avLst/>
+          </a:prstGeom>
+          <a:noFill/>
+        </p:spPr>
+        <p:txBody>
+          <a:bodyPr wrap="square">
+            <a:spAutoFit/>
+          </a:bodyPr>
+          <a:lstStyle/>
+          <a:p>
+            <a:pPr>
+              <a:spcAft>
+                <a:spcPts val="700"/>
+              </a:spcAft>
+              <a:defRPr sz="1150">
+                <a:solidFill>
+                  <a:srgbClr val="334155"/>
+                </a:solidFill>
+                <a:latin typeface="Segoe UI"/>
+              </a:defRPr>
+            </a:pPr>
+            <a:r>
+              <a:t>• Revitalizing Local Spaces: Drives traffic to indie cafes, makerspaces, and community centers.</a:t>
+            </a:r>
+          </a:p>
+          <a:p>
+            <a:pPr>
+              <a:spcAft>
+                <a:spcPts val="700"/>
+              </a:spcAft>
+              <a:defRPr sz="1150">
+                <a:solidFill>
+                  <a:srgbClr val="334155"/>
+                </a:solidFill>
+                <a:latin typeface="Segoe UI"/>
+              </a:defRPr>
+            </a:pPr>
+            <a:r>
+              <a:t>• Fostering Tech Collaborations: Direct serendipity for founders, designers, and engineers.</a:t>
+            </a:r>
+          </a:p>
+          <a:p>
+            <a:pPr>
+              <a:spcAft>
+                <a:spcPts val="700"/>
+              </a:spcAft>
+              <a:defRPr sz="1150">
+                <a:solidFill>
+                  <a:srgbClr val="334155"/>
+                </a:solidFill>
+                <a:latin typeface="Segoe UI"/>
+              </a:defRPr>
+            </a:pPr>
+            <a:r>
+              <a:t>• True Digital Inclusivity: Accessible HIG design, full keyboard navigation, and lightweight data consumption on mobile 4G/5G networks.</a:t>
+            </a:r>
+          </a:p>
+        </p:txBody>
+      </p:sp>
+    </p:spTree>
+  </p:cSld>
+  <p:clrMapOvr>
+    <a:masterClrMapping/>
+  </p:clrMapOvr>
+</p:sld>
+</file>
+
+<file path=ppt/slides/slide6.xml><?xml version="1.0" encoding="utf-8"?>
+<p:sld xmlns:a="http://schemas.openxmlformats.org/drawingml/2006/main" xmlns:p="http://schemas.openxmlformats.org/presentationml/2006/main" xmlns:r="http://schemas.openxmlformats.org/officeDocument/2006/relationships">
+  <p:cSld>
+    <p:bg>
+      <p:bgPr>
+        <a:solidFill>
+          <a:srgbClr val="F8FAFC"/>
+        </a:solidFill>
+        <a:effectLst/>
+      </p:bgPr>
+    </p:bg>
+    <p:spTree>
+      <p:nvGrpSpPr>
+        <p:cNvPr id="1" name=""/>
+        <p:cNvGrpSpPr/>
+        <p:nvPr/>
+      </p:nvGrpSpPr>
+      <p:grpSpPr/>
+      <p:sp>
+        <p:nvSpPr>
+          <p:cNvPr id="2" name="Rounded Rectangle 1"/>
+          <p:cNvSpPr/>
+          <p:nvPr/>
+        </p:nvSpPr>
+        <p:spPr>
+          <a:xfrm>
+            <a:off x="731520" y="384048"/>
+            <a:ext cx="3931920" cy="292608"/>
+          </a:xfrm>
+          <a:prstGeom prst="roundRect">
+            <a:avLst/>
+          </a:prstGeom>
+          <a:solidFill>
+            <a:srgbClr val="EEF2FF"/>
+          </a:solidFill>
+          <a:ln w="12700">
+            <a:solidFill>
+              <a:srgbClr val="C7D2FE"/>
+            </a:solidFill>
+          </a:ln>
+        </p:spPr>
+        <p:style>
+          <a:lnRef idx="1">
+            <a:schemeClr val="accent1"/>
+          </a:lnRef>
+          <a:fillRef idx="3">
+            <a:schemeClr val="accent1"/>
+          </a:fillRef>
+          <a:effectRef idx="2">
+            <a:schemeClr val="accent1"/>
+          </a:effectRef>
+          <a:fontRef idx="minor">
+            <a:schemeClr val="lt1"/>
+          </a:fontRef>
+        </p:style>
+        <p:txBody>
+          <a:bodyPr rtlCol="0" anchor="ctr" wrap="square"/>
+          <a:lstStyle/>
+          <a:p>
+            <a:pPr algn="ctr">
+              <a:defRPr sz="950" b="1">
+                <a:solidFill>
+                  <a:srgbClr val="2563EB"/>
+                </a:solidFill>
+                <a:latin typeface="Segoe UI"/>
+              </a:defRPr>
+            </a:pPr>
+            <a:r>
+              <a:t>EVENT RADAR  •  SLIDE 06 OF 6  •  TEAM VP BOYS</a:t>
+            </a:r>
+          </a:p>
+        </p:txBody>
+      </p:sp>
+      <p:sp>
+        <p:nvSpPr>
+          <p:cNvPr id="3" name="TextBox 2"/>
+          <p:cNvSpPr txBox="1"/>
+          <p:nvPr/>
+        </p:nvSpPr>
+        <p:spPr>
+          <a:xfrm>
+            <a:off x="731520" y="731520"/>
+            <a:ext cx="10698480" cy="621792"/>
+          </a:xfrm>
+          <a:prstGeom prst="rect">
+            <a:avLst/>
+          </a:prstGeom>
+          <a:noFill/>
+        </p:spPr>
+        <p:txBody>
+          <a:bodyPr wrap="square">
+            <a:spAutoFit/>
+          </a:bodyPr>
+          <a:lstStyle/>
+          <a:p>
+            <a:pPr>
+              <a:defRPr sz="2600" b="1">
+                <a:solidFill>
+                  <a:srgbClr val="0F172A"/>
+                </a:solidFill>
+                <a:latin typeface="Segoe UI"/>
+              </a:defRPr>
+            </a:pPr>
+            <a:r>
+              <a:t>Comparison with Existing Platforms</a:t>
+            </a:r>
+          </a:p>
+        </p:txBody>
+      </p:sp>
+      <p:sp>
+        <p:nvSpPr>
+          <p:cNvPr id="4" name="TextBox 3"/>
+          <p:cNvSpPr txBox="1"/>
+          <p:nvPr/>
+        </p:nvSpPr>
+        <p:spPr>
+          <a:xfrm>
+            <a:off x="731520" y="1353312"/>
+            <a:ext cx="10698480" cy="384048"/>
+          </a:xfrm>
+          <a:prstGeom prst="rect">
+            <a:avLst/>
+          </a:prstGeom>
+          <a:noFill/>
+        </p:spPr>
+        <p:txBody>
+          <a:bodyPr wrap="square">
+            <a:spAutoFit/>
+          </a:bodyPr>
+          <a:lstStyle/>
+          <a:p>
+            <a:pPr>
               <a:defRPr sz="1300">
                 <a:solidFill>
-                  <a:srgbClr val="94A3B8"/>
+                  <a:srgbClr val="64748B"/>
                 </a:solidFill>
                 <a:latin typeface="Segoe UI"/>
               </a:defRPr>
@@ -5914,7 +7267,7 @@
                       <a:pPr algn="l">
                         <a:defRPr sz="1150" b="1">
                           <a:solidFill>
-                            <a:srgbClr val="F8FAFC"/>
+                            <a:srgbClr val="0F172A"/>
                           </a:solidFill>
                           <a:latin typeface="Segoe UI"/>
                         </a:defRPr>
@@ -5926,7 +7279,7 @@
                   </a:txBody>
                   <a:tcPr>
                     <a:solidFill>
-                      <a:srgbClr val="161C2D"/>
+                      <a:srgbClr val="F1F5F9"/>
                     </a:solidFill>
                   </a:tcPr>
                 </a:tc>
@@ -5938,7 +7291,7 @@
                       <a:pPr algn="l">
                         <a:defRPr sz="1150" b="1">
                           <a:solidFill>
-                            <a:srgbClr val="06B6D4"/>
+                            <a:srgbClr val="2563EB"/>
                           </a:solidFill>
                           <a:latin typeface="Segoe UI"/>
                         </a:defRPr>
@@ -5950,7 +7303,7 @@
                   </a:txBody>
                   <a:tcPr>
                     <a:solidFill>
-                      <a:srgbClr val="161C2D"/>
+                      <a:srgbClr val="E0E7FF"/>
                     </a:solidFill>
                   </a:tcPr>
                 </a:tc>
@@ -5962,7 +7315,7 @@
                       <a:pPr algn="l">
                         <a:defRPr sz="1150" b="1">
                           <a:solidFill>
-                            <a:srgbClr val="F8FAFC"/>
+                            <a:srgbClr val="0F172A"/>
                           </a:solidFill>
                           <a:latin typeface="Segoe UI"/>
                         </a:defRPr>
@@ -5974,7 +7327,7 @@
                   </a:txBody>
                   <a:tcPr>
                     <a:solidFill>
-                      <a:srgbClr val="161C2D"/>
+                      <a:srgbClr val="F1F5F9"/>
                     </a:solidFill>
                   </a:tcPr>
                 </a:tc>
@@ -5986,7 +7339,7 @@
                       <a:pPr algn="l">
                         <a:defRPr sz="1150" b="1">
                           <a:solidFill>
-                            <a:srgbClr val="F8FAFC"/>
+                            <a:srgbClr val="0F172A"/>
                           </a:solidFill>
                           <a:latin typeface="Segoe UI"/>
                         </a:defRPr>
@@ -5998,7 +7351,7 @@
                   </a:txBody>
                   <a:tcPr>
                     <a:solidFill>
-                      <a:srgbClr val="161C2D"/>
+                      <a:srgbClr val="F1F5F9"/>
                     </a:solidFill>
                   </a:tcPr>
                 </a:tc>
@@ -6010,7 +7363,7 @@
                       <a:pPr algn="l">
                         <a:defRPr sz="1150" b="1">
                           <a:solidFill>
-                            <a:srgbClr val="F8FAFC"/>
+                            <a:srgbClr val="0F172A"/>
                           </a:solidFill>
                           <a:latin typeface="Segoe UI"/>
                         </a:defRPr>
@@ -6022,7 +7375,7 @@
                   </a:txBody>
                   <a:tcPr>
                     <a:solidFill>
-                      <a:srgbClr val="161C2D"/>
+                      <a:srgbClr val="F1F5F9"/>
                     </a:solidFill>
                   </a:tcPr>
                 </a:tc>
@@ -6036,7 +7389,7 @@
                       <a:pPr>
                         <a:defRPr sz="1050" b="1">
                           <a:solidFill>
-                            <a:srgbClr val="F8FAFC"/>
+                            <a:srgbClr val="0F172A"/>
                           </a:solidFill>
                           <a:latin typeface="Segoe UI"/>
                         </a:defRPr>
@@ -6048,7 +7401,7 @@
                   </a:txBody>
                   <a:tcPr>
                     <a:solidFill>
-                      <a:srgbClr val="161C2D"/>
+                      <a:srgbClr val="FFFFFF"/>
                     </a:solidFill>
                   </a:tcPr>
                 </a:tc>
@@ -6060,7 +7413,7 @@
                       <a:pPr>
                         <a:defRPr sz="1050" b="1">
                           <a:solidFill>
-                            <a:srgbClr val="10B981"/>
+                            <a:srgbClr val="059669"/>
                           </a:solidFill>
                           <a:latin typeface="Segoe UI"/>
                         </a:defRPr>
@@ -6072,7 +7425,7 @@
                   </a:txBody>
                   <a:tcPr>
                     <a:solidFill>
-                      <a:srgbClr val="1C2844"/>
+                      <a:srgbClr val="EFF6FF"/>
                     </a:solidFill>
                   </a:tcPr>
                 </a:tc>
@@ -6084,7 +7437,7 @@
                       <a:pPr>
                         <a:defRPr sz="1050">
                           <a:solidFill>
-                            <a:srgbClr val="94A3B8"/>
+                            <a:srgbClr val="64748B"/>
                           </a:solidFill>
                           <a:latin typeface="Segoe UI"/>
                         </a:defRPr>
@@ -6096,7 +7449,7 @@
                   </a:txBody>
                   <a:tcPr>
                     <a:solidFill>
-                      <a:srgbClr val="161C2D"/>
+                      <a:srgbClr val="FFFFFF"/>
                     </a:solidFill>
                   </a:tcPr>
                 </a:tc>
@@ -6108,7 +7461,7 @@
                       <a:pPr>
                         <a:defRPr sz="1050">
                           <a:solidFill>
-                            <a:srgbClr val="94A3B8"/>
+                            <a:srgbClr val="64748B"/>
                           </a:solidFill>
                           <a:latin typeface="Segoe UI"/>
                         </a:defRPr>
@@ -6120,7 +7473,7 @@
                   </a:txBody>
                   <a:tcPr>
                     <a:solidFill>
-                      <a:srgbClr val="161C2D"/>
+                      <a:srgbClr val="FFFFFF"/>
                     </a:solidFill>
                   </a:tcPr>
                 </a:tc>
@@ -6132,7 +7485,7 @@
                       <a:pPr>
                         <a:defRPr sz="1050">
                           <a:solidFill>
-                            <a:srgbClr val="94A3B8"/>
+                            <a:srgbClr val="64748B"/>
                           </a:solidFill>
                           <a:latin typeface="Segoe UI"/>
                         </a:defRPr>
@@ -6144,7 +7497,7 @@
                   </a:txBody>
                   <a:tcPr>
                     <a:solidFill>
-                      <a:srgbClr val="161C2D"/>
+                      <a:srgbClr val="FFFFFF"/>
                     </a:solidFill>
                   </a:tcPr>
                 </a:tc>
@@ -6158,7 +7511,7 @@
                       <a:pPr>
                         <a:defRPr sz="1050" b="1">
                           <a:solidFill>
-                            <a:srgbClr val="F8FAFC"/>
+                            <a:srgbClr val="0F172A"/>
                           </a:solidFill>
                           <a:latin typeface="Segoe UI"/>
                         </a:defRPr>
@@ -6170,7 +7523,7 @@
                   </a:txBody>
                   <a:tcPr>
                     <a:solidFill>
-                      <a:srgbClr val="101522"/>
+                      <a:srgbClr val="F8FAFC"/>
                     </a:solidFill>
                   </a:tcPr>
                 </a:tc>
@@ -6182,7 +7535,7 @@
                       <a:pPr>
                         <a:defRPr sz="1050" b="1">
                           <a:solidFill>
-                            <a:srgbClr val="10B981"/>
+                            <a:srgbClr val="059669"/>
                           </a:solidFill>
                           <a:latin typeface="Segoe UI"/>
                         </a:defRPr>
@@ -6194,7 +7547,7 @@
                   </a:txBody>
                   <a:tcPr>
                     <a:solidFill>
-                      <a:srgbClr val="1C2844"/>
+                      <a:srgbClr val="EFF6FF"/>
                     </a:solidFill>
                   </a:tcPr>
                 </a:tc>
@@ -6206,7 +7559,7 @@
                       <a:pPr>
                         <a:defRPr sz="1050">
                           <a:solidFill>
-                            <a:srgbClr val="94A3B8"/>
+                            <a:srgbClr val="64748B"/>
                           </a:solidFill>
                           <a:latin typeface="Segoe UI"/>
                         </a:defRPr>
@@ -6218,7 +7571,7 @@
                   </a:txBody>
                   <a:tcPr>
                     <a:solidFill>
-                      <a:srgbClr val="101522"/>
+                      <a:srgbClr val="F8FAFC"/>
                     </a:solidFill>
                   </a:tcPr>
                 </a:tc>
@@ -6230,7 +7583,7 @@
                       <a:pPr>
                         <a:defRPr sz="1050">
                           <a:solidFill>
-                            <a:srgbClr val="94A3B8"/>
+                            <a:srgbClr val="64748B"/>
                           </a:solidFill>
                           <a:latin typeface="Segoe UI"/>
                         </a:defRPr>
@@ -6242,7 +7595,7 @@
                   </a:txBody>
                   <a:tcPr>
                     <a:solidFill>
-                      <a:srgbClr val="101522"/>
+                      <a:srgbClr val="F8FAFC"/>
                     </a:solidFill>
                   </a:tcPr>
                 </a:tc>
@@ -6254,7 +7607,7 @@
                       <a:pPr>
                         <a:defRPr sz="1050">
                           <a:solidFill>
-                            <a:srgbClr val="94A3B8"/>
+                            <a:srgbClr val="64748B"/>
                           </a:solidFill>
                           <a:latin typeface="Segoe UI"/>
                         </a:defRPr>
@@ -6266,7 +7619,7 @@
                   </a:txBody>
                   <a:tcPr>
                     <a:solidFill>
-                      <a:srgbClr val="101522"/>
+                      <a:srgbClr val="F8FAFC"/>
                     </a:solidFill>
                   </a:tcPr>
                 </a:tc>
@@ -6280,7 +7633,7 @@
                       <a:pPr>
                         <a:defRPr sz="1050" b="1">
                           <a:solidFill>
-                            <a:srgbClr val="F8FAFC"/>
+                            <a:srgbClr val="0F172A"/>
                           </a:solidFill>
                           <a:latin typeface="Segoe UI"/>
                         </a:defRPr>
@@ -6292,7 +7645,7 @@
                   </a:txBody>
                   <a:tcPr>
                     <a:solidFill>
-                      <a:srgbClr val="161C2D"/>
+                      <a:srgbClr val="FFFFFF"/>
                     </a:solidFill>
                   </a:tcPr>
                 </a:tc>
@@ -6304,7 +7657,7 @@
                       <a:pPr>
                         <a:defRPr sz="1050" b="1">
                           <a:solidFill>
-                            <a:srgbClr val="10B981"/>
+                            <a:srgbClr val="059669"/>
                           </a:solidFill>
                           <a:latin typeface="Segoe UI"/>
                         </a:defRPr>
@@ -6316,7 +7669,7 @@
                   </a:txBody>
                   <a:tcPr>
                     <a:solidFill>
-                      <a:srgbClr val="1C2844"/>
+                      <a:srgbClr val="EFF6FF"/>
                     </a:solidFill>
                   </a:tcPr>
                 </a:tc>
@@ -6328,7 +7681,7 @@
                       <a:pPr>
                         <a:defRPr sz="1050">
                           <a:solidFill>
-                            <a:srgbClr val="94A3B8"/>
+                            <a:srgbClr val="64748B"/>
                           </a:solidFill>
                           <a:latin typeface="Segoe UI"/>
                         </a:defRPr>
@@ -6340,7 +7693,7 @@
                   </a:txBody>
                   <a:tcPr>
                     <a:solidFill>
-                      <a:srgbClr val="161C2D"/>
+                      <a:srgbClr val="FFFFFF"/>
                     </a:solidFill>
                   </a:tcPr>
                 </a:tc>
@@ -6352,7 +7705,7 @@
                       <a:pPr>
                         <a:defRPr sz="1050">
                           <a:solidFill>
-                            <a:srgbClr val="94A3B8"/>
+                            <a:srgbClr val="64748B"/>
                           </a:solidFill>
                           <a:latin typeface="Segoe UI"/>
                         </a:defRPr>
@@ -6364,7 +7717,7 @@
                   </a:txBody>
                   <a:tcPr>
                     <a:solidFill>
-                      <a:srgbClr val="161C2D"/>
+                      <a:srgbClr val="FFFFFF"/>
                     </a:solidFill>
                   </a:tcPr>
                 </a:tc>
@@ -6376,7 +7729,7 @@
                       <a:pPr>
                         <a:defRPr sz="1050">
                           <a:solidFill>
-                            <a:srgbClr val="94A3B8"/>
+                            <a:srgbClr val="64748B"/>
                           </a:solidFill>
                           <a:latin typeface="Segoe UI"/>
                         </a:defRPr>
@@ -6388,7 +7741,7 @@
                   </a:txBody>
                   <a:tcPr>
                     <a:solidFill>
-                      <a:srgbClr val="161C2D"/>
+                      <a:srgbClr val="FFFFFF"/>
                     </a:solidFill>
                   </a:tcPr>
                 </a:tc>
@@ -6402,7 +7755,7 @@
                       <a:pPr>
                         <a:defRPr sz="1050" b="1">
                           <a:solidFill>
-                            <a:srgbClr val="F8FAFC"/>
+                            <a:srgbClr val="0F172A"/>
                           </a:solidFill>
                           <a:latin typeface="Segoe UI"/>
                         </a:defRPr>
@@ -6414,7 +7767,7 @@
                   </a:txBody>
                   <a:tcPr>
                     <a:solidFill>
-                      <a:srgbClr val="101522"/>
+                      <a:srgbClr val="F8FAFC"/>
                     </a:solidFill>
                   </a:tcPr>
                 </a:tc>
@@ -6426,7 +7779,7 @@
                       <a:pPr>
                         <a:defRPr sz="1050" b="1">
                           <a:solidFill>
-                            <a:srgbClr val="10B981"/>
+                            <a:srgbClr val="059669"/>
                           </a:solidFill>
                           <a:latin typeface="Segoe UI"/>
                         </a:defRPr>
@@ -6438,7 +7791,7 @@
                   </a:txBody>
                   <a:tcPr>
                     <a:solidFill>
-                      <a:srgbClr val="1C2844"/>
+                      <a:srgbClr val="EFF6FF"/>
                     </a:solidFill>
                   </a:tcPr>
                 </a:tc>
@@ -6450,7 +7803,7 @@
                       <a:pPr>
                         <a:defRPr sz="1050">
                           <a:solidFill>
-                            <a:srgbClr val="94A3B8"/>
+                            <a:srgbClr val="64748B"/>
                           </a:solidFill>
                           <a:latin typeface="Segoe UI"/>
                         </a:defRPr>
@@ -6462,7 +7815,7 @@
                   </a:txBody>
                   <a:tcPr>
                     <a:solidFill>
-                      <a:srgbClr val="101522"/>
+                      <a:srgbClr val="F8FAFC"/>
                     </a:solidFill>
                   </a:tcPr>
                 </a:tc>
@@ -6474,7 +7827,7 @@
                       <a:pPr>
                         <a:defRPr sz="1050">
                           <a:solidFill>
-                            <a:srgbClr val="94A3B8"/>
+                            <a:srgbClr val="64748B"/>
                           </a:solidFill>
                           <a:latin typeface="Segoe UI"/>
                         </a:defRPr>
@@ -6486,7 +7839,7 @@
                   </a:txBody>
                   <a:tcPr>
                     <a:solidFill>
-                      <a:srgbClr val="101522"/>
+                      <a:srgbClr val="F8FAFC"/>
                     </a:solidFill>
                   </a:tcPr>
                 </a:tc>
@@ -6498,7 +7851,7 @@
                       <a:pPr>
                         <a:defRPr sz="1050">
                           <a:solidFill>
-                            <a:srgbClr val="94A3B8"/>
+                            <a:srgbClr val="64748B"/>
                           </a:solidFill>
                           <a:latin typeface="Segoe UI"/>
                         </a:defRPr>
@@ -6510,7 +7863,7 @@
                   </a:txBody>
                   <a:tcPr>
                     <a:solidFill>
-                      <a:srgbClr val="101522"/>
+                      <a:srgbClr val="F8FAFC"/>
                     </a:solidFill>
                   </a:tcPr>
                 </a:tc>
@@ -6524,7 +7877,7 @@
                       <a:pPr>
                         <a:defRPr sz="1050" b="1">
                           <a:solidFill>
-                            <a:srgbClr val="F8FAFC"/>
+                            <a:srgbClr val="0F172A"/>
                           </a:solidFill>
                           <a:latin typeface="Segoe UI"/>
                         </a:defRPr>
@@ -6536,7 +7889,7 @@
                   </a:txBody>
                   <a:tcPr>
                     <a:solidFill>
-                      <a:srgbClr val="161C2D"/>
+                      <a:srgbClr val="FFFFFF"/>
                     </a:solidFill>
                   </a:tcPr>
                 </a:tc>
@@ -6548,7 +7901,7 @@
                       <a:pPr>
                         <a:defRPr sz="1050" b="1">
                           <a:solidFill>
-                            <a:srgbClr val="10B981"/>
+                            <a:srgbClr val="059669"/>
                           </a:solidFill>
                           <a:latin typeface="Segoe UI"/>
                         </a:defRPr>
@@ -6560,7 +7913,7 @@
                   </a:txBody>
                   <a:tcPr>
                     <a:solidFill>
-                      <a:srgbClr val="1C2844"/>
+                      <a:srgbClr val="EFF6FF"/>
                     </a:solidFill>
                   </a:tcPr>
                 </a:tc>
@@ -6572,7 +7925,7 @@
                       <a:pPr>
                         <a:defRPr sz="1050">
                           <a:solidFill>
-                            <a:srgbClr val="94A3B8"/>
+                            <a:srgbClr val="64748B"/>
                           </a:solidFill>
                           <a:latin typeface="Segoe UI"/>
                         </a:defRPr>
@@ -6584,7 +7937,7 @@
                   </a:txBody>
                   <a:tcPr>
                     <a:solidFill>
-                      <a:srgbClr val="161C2D"/>
+                      <a:srgbClr val="FFFFFF"/>
                     </a:solidFill>
                   </a:tcPr>
                 </a:tc>
@@ -6596,7 +7949,7 @@
                       <a:pPr>
                         <a:defRPr sz="1050">
                           <a:solidFill>
-                            <a:srgbClr val="94A3B8"/>
+                            <a:srgbClr val="64748B"/>
                           </a:solidFill>
                           <a:latin typeface="Segoe UI"/>
                         </a:defRPr>
@@ -6608,7 +7961,7 @@
                   </a:txBody>
                   <a:tcPr>
                     <a:solidFill>
-                      <a:srgbClr val="161C2D"/>
+                      <a:srgbClr val="FFFFFF"/>
                     </a:solidFill>
                   </a:tcPr>
                 </a:tc>
@@ -6620,7 +7973,7 @@
                       <a:pPr>
                         <a:defRPr sz="1050">
                           <a:solidFill>
-                            <a:srgbClr val="94A3B8"/>
+                            <a:srgbClr val="64748B"/>
                           </a:solidFill>
                           <a:latin typeface="Segoe UI"/>
                         </a:defRPr>
@@ -6632,7 +7985,7 @@
                   </a:txBody>
                   <a:tcPr>
                     <a:solidFill>
-                      <a:srgbClr val="161C2D"/>
+                      <a:srgbClr val="FFFFFF"/>
                     </a:solidFill>
                   </a:tcPr>
                 </a:tc>
@@ -6646,7 +7999,7 @@
                       <a:pPr>
                         <a:defRPr sz="1050" b="1">
                           <a:solidFill>
-                            <a:srgbClr val="F8FAFC"/>
+                            <a:srgbClr val="0F172A"/>
                           </a:solidFill>
                           <a:latin typeface="Segoe UI"/>
                         </a:defRPr>
@@ -6658,7 +8011,7 @@
                   </a:txBody>
                   <a:tcPr>
                     <a:solidFill>
-                      <a:srgbClr val="101522"/>
+                      <a:srgbClr val="F8FAFC"/>
                     </a:solidFill>
                   </a:tcPr>
                 </a:tc>
@@ -6670,19 +8023,19 @@
                       <a:pPr>
                         <a:defRPr sz="1050" b="1">
                           <a:solidFill>
-                            <a:srgbClr val="10B981"/>
+                            <a:srgbClr val="059669"/>
                           </a:solidFill>
                           <a:latin typeface="Segoe UI"/>
                         </a:defRPr>
                       </a:pPr>
                       <a:r>
-                        <a:t>Apple HIG Glassmorphism</a:t>
+                        <a:t>Apple HIG Clean Light</a:t>
                       </a:r>
                     </a:p>
                   </a:txBody>
                   <a:tcPr>
                     <a:solidFill>
-                      <a:srgbClr val="1C2844"/>
+                      <a:srgbClr val="EFF6FF"/>
                     </a:solidFill>
                   </a:tcPr>
                 </a:tc>
@@ -6694,7 +8047,7 @@
                       <a:pPr>
                         <a:defRPr sz="1050">
                           <a:solidFill>
-                            <a:srgbClr val="94A3B8"/>
+                            <a:srgbClr val="64748B"/>
                           </a:solidFill>
                           <a:latin typeface="Segoe UI"/>
                         </a:defRPr>
@@ -6706,7 +8059,7 @@
                   </a:txBody>
                   <a:tcPr>
                     <a:solidFill>
-                      <a:srgbClr val="101522"/>
+                      <a:srgbClr val="F8FAFC"/>
                     </a:solidFill>
                   </a:tcPr>
                 </a:tc>
@@ -6718,7 +8071,7 @@
                       <a:pPr>
                         <a:defRPr sz="1050">
                           <a:solidFill>
-                            <a:srgbClr val="94A3B8"/>
+                            <a:srgbClr val="64748B"/>
                           </a:solidFill>
                           <a:latin typeface="Segoe UI"/>
                         </a:defRPr>
@@ -6730,7 +8083,7 @@
                   </a:txBody>
                   <a:tcPr>
                     <a:solidFill>
-                      <a:srgbClr val="101522"/>
+                      <a:srgbClr val="F8FAFC"/>
                     </a:solidFill>
                   </a:tcPr>
                 </a:tc>
@@ -6742,7 +8095,7 @@
                       <a:pPr>
                         <a:defRPr sz="1050">
                           <a:solidFill>
-                            <a:srgbClr val="94A3B8"/>
+                            <a:srgbClr val="64748B"/>
                           </a:solidFill>
                           <a:latin typeface="Segoe UI"/>
                         </a:defRPr>
@@ -6754,7 +8107,7 @@
                   </a:txBody>
                   <a:tcPr>
                     <a:solidFill>
-                      <a:srgbClr val="101522"/>
+                      <a:srgbClr val="F8FAFC"/>
                     </a:solidFill>
                   </a:tcPr>
                 </a:tc>
@@ -6778,11 +8131,11 @@
             <a:avLst/>
           </a:prstGeom>
           <a:solidFill>
-            <a:srgbClr val="121E38"/>
+            <a:srgbClr val="F0FDFA"/>
           </a:solidFill>
           <a:ln w="19050">
             <a:solidFill>
-              <a:srgbClr val="3B82F6"/>
+              <a:srgbClr val="99F6E4"/>
             </a:solidFill>
           </a:ln>
         </p:spPr>
@@ -6833,7 +8186,7 @@
             <a:pPr>
               <a:defRPr sz="1200" b="1">
                 <a:solidFill>
-                  <a:srgbClr val="06B6D4"/>
+                  <a:srgbClr val="0284C7"/>
                 </a:solidFill>
                 <a:latin typeface="Segoe UI"/>
               </a:defRPr>
@@ -6846,7 +8199,7 @@
             <a:pPr>
               <a:defRPr sz="1000">
                 <a:solidFill>
-                  <a:srgbClr val="F8FAFC"/>
+                  <a:srgbClr val="0F172A"/>
                 </a:solidFill>
                 <a:latin typeface="Segoe UI"/>
               </a:defRPr>

--- a/EventRadar_Presentation.pptx
+++ b/EventRadar_Presentation.pptx
@@ -3711,7 +3711,7 @@
             </a:r>
             <a:br/>
             <a:r>
-              <a:t>github.com/Shivanand-Varpe/GeoGuild</a:t>
+              <a:t>github.com/Shivanand-Varpe/VP-Boys_ShivanandVarpe</a:t>
             </a:r>
           </a:p>
         </p:txBody>
